--- a/examples/alvora/output/2_final/deck.pptx
+++ b/examples/alvora/output/2_final/deck.pptx
@@ -131,9 +131,9 @@
           <c:xMode val="edge"/>
           <c:yMode val="edge"/>
           <c:x val="0.01"/>
-          <c:y val="0.01064"/>
-          <c:w val="0.83298"/>
-          <c:h val="0.92926"/>
+          <c:y val="0.01319"/>
+          <c:w val="0.88626"/>
+          <c:h val="0.91227"/>
         </c:manualLayout>
       </c:layout>
       <c:barChart>
@@ -670,7 +670,7 @@
       <c:valAx>
         <c:axId val="-2113994440"/>
         <c:scaling>
-          <c:max val="175.0"/>
+          <c:max val="187.5"/>
           <c:min val="0.0"/>
         </c:scaling>
         <c:delete/>
@@ -752,10 +752,18 @@
           </c:tx>
           <c:spPr>
             <a:solidFill>
-              <a:srgbClr val="0B1F3A"/>
+              <a:srgbClr val="8FA9CC"/>
             </a:solidFill>
           </c:spPr>
           <c:invertIfNegative val="0"/>
+          <c:dPt>
+            <c:idx val="3"/>
+            <c:spPr>
+              <a:solidFill>
+                <a:srgbClr val="0B1F3A"/>
+              </a:solidFill>
+            </c:spPr>
+          </c:dPt>
           <c:dLbls>
             <c:numFmt formatCode="#,##0.0;-#,##0.0" sourceLinked="0"/>
             <c:txPr>
@@ -868,7 +876,7 @@
       <c:valAx>
         <c:axId val="-2113994440"/>
         <c:scaling>
-          <c:max val="17.5"/>
+          <c:max val="26.25"/>
           <c:min val="0.0"/>
         </c:scaling>
         <c:delete/>
@@ -6475,7 +6483,7 @@
         <p:spPr>
           <a:xfrm>
             <a:off x="502920" y="6272784"/>
-            <a:ext cx="10088575" cy="402336"/>
+            <a:ext cx="8808415" cy="402336"/>
           </a:xfrm>
           <a:prstGeom prst="rect">
             <a:avLst/>
@@ -8300,7 +8308,7 @@
         <p:spPr>
           <a:xfrm>
             <a:off x="502920" y="6272784"/>
-            <a:ext cx="10088575" cy="402336"/>
+            <a:ext cx="8808415" cy="402336"/>
           </a:xfrm>
           <a:prstGeom prst="rect">
             <a:avLst/>
@@ -9154,7 +9162,7 @@
         <p:spPr>
           <a:xfrm>
             <a:off x="502920" y="6272784"/>
-            <a:ext cx="10088575" cy="402336"/>
+            <a:ext cx="8808415" cy="402336"/>
           </a:xfrm>
           <a:prstGeom prst="rect">
             <a:avLst/>
@@ -9232,7 +9240,7 @@
         <p:spPr>
           <a:xfrm>
             <a:off x="502920" y="1481328"/>
-            <a:ext cx="7390181" cy="274320"/>
+            <a:ext cx="11185855" cy="274320"/>
           </a:xfrm>
           <a:prstGeom prst="rect">
             <a:avLst/>
@@ -9272,7 +9280,7 @@
         </p:nvGraphicFramePr>
         <p:xfrm>
           <a:off x="502920" y="1901952"/>
-          <a:ext cx="7390181" cy="1914525"/>
+          <a:ext cx="11185855" cy="3491865"/>
         </p:xfrm>
         <a:graphic>
           <a:graphicData uri="http://schemas.openxmlformats.org/drawingml/2006/table">
@@ -9282,12 +9290,12 @@
               </a:tblPr>
               <a:tblGrid>
                 <a:gridCol w="4206240"/>
-                <a:gridCol w="716798"/>
-                <a:gridCol w="856875"/>
-                <a:gridCol w="805134"/>
-                <a:gridCol w="805134"/>
+                <a:gridCol w="2035429"/>
+                <a:gridCol w="2200986"/>
+                <a:gridCol w="1371600"/>
+                <a:gridCol w="1371600"/>
               </a:tblGrid>
-              <a:tr h="464058">
+              <a:tr h="523494">
                 <a:tc>
                   <a:txBody>
                     <a:bodyPr wrap="square"/>
@@ -9295,7 +9303,7 @@
                     <a:p>
                       <a:pPr algn="l"/>
                       <a:r>
-                        <a:rPr sz="1100" b="1">
+                        <a:rPr sz="1300" b="1">
                           <a:solidFill>
                             <a:srgbClr val="1E252D"/>
                           </a:solidFill>
@@ -9331,7 +9339,7 @@
                     <a:p>
                       <a:pPr algn="l"/>
                       <a:r>
-                        <a:rPr sz="1100" b="1">
+                        <a:rPr sz="1300" b="1">
                           <a:solidFill>
                             <a:srgbClr val="1E252D"/>
                           </a:solidFill>
@@ -9367,7 +9375,7 @@
                     <a:p>
                       <a:pPr algn="l"/>
                       <a:r>
-                        <a:rPr sz="1100" b="1">
+                        <a:rPr sz="1300" b="1">
                           <a:solidFill>
                             <a:srgbClr val="1E252D"/>
                           </a:solidFill>
@@ -9403,7 +9411,7 @@
                     <a:p>
                       <a:pPr algn="r"/>
                       <a:r>
-                        <a:rPr sz="1100" b="1">
+                        <a:rPr sz="1300" b="1">
                           <a:solidFill>
                             <a:srgbClr val="1E252D"/>
                           </a:solidFill>
@@ -9439,7 +9447,7 @@
                     <a:p>
                       <a:pPr algn="ctr"/>
                       <a:r>
-                        <a:rPr sz="1100" b="1">
+                        <a:rPr sz="1300" b="1">
                           <a:solidFill>
                             <a:srgbClr val="1E252D"/>
                           </a:solidFill>
@@ -9469,7 +9477,7 @@
                   </a:tcPr>
                 </a:tc>
               </a:tr>
-              <a:tr h="483489">
+              <a:tr h="860679">
                 <a:tc>
                   <a:txBody>
                     <a:bodyPr wrap="square"/>
@@ -9477,7 +9485,7 @@
                     <a:p>
                       <a:pPr algn="l"/>
                       <a:r>
-                        <a:rPr sz="1100" b="0">
+                        <a:rPr sz="1300" b="0">
                           <a:solidFill>
                             <a:srgbClr val="1E252D"/>
                           </a:solidFill>
@@ -9513,7 +9521,7 @@
                     <a:p>
                       <a:pPr algn="l"/>
                       <a:r>
-                        <a:rPr sz="1100" b="0">
+                        <a:rPr sz="1300" b="0">
                           <a:solidFill>
                             <a:srgbClr val="1E252D"/>
                           </a:solidFill>
@@ -9549,7 +9557,7 @@
                     <a:p>
                       <a:pPr algn="l"/>
                       <a:r>
-                        <a:rPr sz="1100" b="0">
+                        <a:rPr sz="1300" b="0">
                           <a:solidFill>
                             <a:srgbClr val="1E252D"/>
                           </a:solidFill>
@@ -9585,7 +9593,7 @@
                     <a:p>
                       <a:pPr algn="r"/>
                       <a:r>
-                        <a:rPr sz="1100" b="0">
+                        <a:rPr sz="1300" b="0">
                           <a:solidFill>
                             <a:srgbClr val="1E252D"/>
                           </a:solidFill>
@@ -9621,7 +9629,7 @@
                     <a:p>
                       <a:pPr algn="ctr"/>
                       <a:r>
-                        <a:rPr sz="1100" b="0">
+                        <a:rPr sz="1300" b="0">
                           <a:solidFill>
                             <a:srgbClr val="1E252D"/>
                           </a:solidFill>
@@ -9651,7 +9659,7 @@
                   </a:tcPr>
                 </a:tc>
               </a:tr>
-              <a:tr h="483489">
+              <a:tr h="1053846">
                 <a:tc>
                   <a:txBody>
                     <a:bodyPr wrap="square"/>
@@ -9659,7 +9667,7 @@
                     <a:p>
                       <a:pPr algn="l"/>
                       <a:r>
-                        <a:rPr sz="1100" b="0">
+                        <a:rPr sz="1300" b="0">
                           <a:solidFill>
                             <a:srgbClr val="1E252D"/>
                           </a:solidFill>
@@ -9695,7 +9703,7 @@
                     <a:p>
                       <a:pPr algn="l"/>
                       <a:r>
-                        <a:rPr sz="1100" b="0">
+                        <a:rPr sz="1300" b="0">
                           <a:solidFill>
                             <a:srgbClr val="1E252D"/>
                           </a:solidFill>
@@ -9731,7 +9739,7 @@
                     <a:p>
                       <a:pPr algn="l"/>
                       <a:r>
-                        <a:rPr sz="1100" b="0">
+                        <a:rPr sz="1300" b="0">
                           <a:solidFill>
                             <a:srgbClr val="1E252D"/>
                           </a:solidFill>
@@ -9767,7 +9775,7 @@
                     <a:p>
                       <a:pPr algn="r"/>
                       <a:r>
-                        <a:rPr sz="1100" b="0">
+                        <a:rPr sz="1300" b="0">
                           <a:solidFill>
                             <a:srgbClr val="1E252D"/>
                           </a:solidFill>
@@ -9803,7 +9811,7 @@
                     <a:p>
                       <a:pPr algn="ctr"/>
                       <a:r>
-                        <a:rPr sz="1100" b="0">
+                        <a:rPr sz="1300" b="0">
                           <a:solidFill>
                             <a:srgbClr val="1E252D"/>
                           </a:solidFill>
@@ -9833,7 +9841,7 @@
                   </a:tcPr>
                 </a:tc>
               </a:tr>
-              <a:tr h="483489">
+              <a:tr h="1053846">
                 <a:tc>
                   <a:txBody>
                     <a:bodyPr wrap="square"/>
@@ -9841,7 +9849,7 @@
                     <a:p>
                       <a:pPr algn="l"/>
                       <a:r>
-                        <a:rPr sz="1100" b="0">
+                        <a:rPr sz="1300" b="0">
                           <a:solidFill>
                             <a:srgbClr val="1E252D"/>
                           </a:solidFill>
@@ -9877,7 +9885,7 @@
                     <a:p>
                       <a:pPr algn="l"/>
                       <a:r>
-                        <a:rPr sz="1100" b="0">
+                        <a:rPr sz="1300" b="0">
                           <a:solidFill>
                             <a:srgbClr val="1E252D"/>
                           </a:solidFill>
@@ -9913,7 +9921,7 @@
                     <a:p>
                       <a:pPr algn="l"/>
                       <a:r>
-                        <a:rPr sz="1100" b="0">
+                        <a:rPr sz="1300" b="0">
                           <a:solidFill>
                             <a:srgbClr val="1E252D"/>
                           </a:solidFill>
@@ -9949,7 +9957,7 @@
                     <a:p>
                       <a:pPr algn="r"/>
                       <a:r>
-                        <a:rPr sz="1100" b="0">
+                        <a:rPr sz="1300" b="0">
                           <a:solidFill>
                             <a:srgbClr val="1E252D"/>
                           </a:solidFill>
@@ -9985,7 +9993,7 @@
                     <a:p>
                       <a:pPr algn="ctr"/>
                       <a:r>
-                        <a:rPr sz="1100" b="0">
+                        <a:rPr sz="1300" b="0">
                           <a:solidFill>
                             <a:srgbClr val="1E252D"/>
                           </a:solidFill>
@@ -10027,7 +10035,7 @@
         </p:nvSpPr>
         <p:spPr>
           <a:xfrm>
-            <a:off x="7371662" y="2488883"/>
+            <a:off x="10884103" y="2736914"/>
             <a:ext cx="237744" cy="237744"/>
           </a:xfrm>
           <a:prstGeom prst="ellipse">
@@ -10056,7 +10064,7 @@
         </p:nvSpPr>
         <p:spPr>
           <a:xfrm>
-            <a:off x="7371662" y="2972372"/>
+            <a:off x="10884103" y="3694176"/>
             <a:ext cx="237744" cy="237744"/>
           </a:xfrm>
           <a:prstGeom prst="ellipse">
@@ -10085,7 +10093,7 @@
         </p:nvSpPr>
         <p:spPr>
           <a:xfrm>
-            <a:off x="7371662" y="3455861"/>
+            <a:off x="10884103" y="4748022"/>
             <a:ext cx="237744" cy="237744"/>
           </a:xfrm>
           <a:prstGeom prst="ellipse">
@@ -10114,8 +10122,8 @@
         </p:nvCxnSpPr>
         <p:spPr>
           <a:xfrm>
-            <a:off x="8094269" y="1481328"/>
-            <a:ext cx="0" cy="4718304"/>
+            <a:off x="502920" y="5709856"/>
+            <a:ext cx="11185855" cy="0"/>
           </a:xfrm>
           <a:prstGeom prst="line">
             <a:avLst/>
@@ -10135,8 +10143,8 @@
         </p:nvSpPr>
         <p:spPr>
           <a:xfrm>
-            <a:off x="8322869" y="1481328"/>
-            <a:ext cx="3365906" cy="4718304"/>
+            <a:off x="502920" y="5847016"/>
+            <a:ext cx="5492344" cy="352616"/>
           </a:xfrm>
           <a:prstGeom prst="rect">
             <a:avLst/>
@@ -10149,22 +10157,13 @@
           </a:bodyPr>
           <a:lstStyle/>
           <a:p>
-            <a:pPr algn="l" marL="155448" indent="-155448">
+            <a:pPr algn="l">
               <a:lnSpc>
-                <a:spcPct val="108000"/>
+                <a:spcPct val="100000"/>
               </a:lnSpc>
-              <a:spcAft>
-                <a:spcPts val="800"/>
-              </a:spcAft>
-              <a:buClr>
-                <a:srgbClr val="1E252D"/>
-              </a:buClr>
-              <a:buSzPct val="100000"/>
-              <a:buFont typeface="Arial"/>
-              <a:buChar char="•"/>
-            </a:pPr>
-            <a:r>
-              <a:rPr sz="1200" b="0">
+            </a:pPr>
+            <a:r>
+              <a:rPr sz="1450" b="0">
                 <a:solidFill>
                   <a:srgbClr val="1E252D"/>
                 </a:solidFill>
@@ -10173,20 +10172,37 @@
               <a:t>Wave 1 is self-funding by Q4 2026</a:t>
             </a:r>
           </a:p>
-          <a:p>
-            <a:pPr algn="l" marL="155448" indent="-155448">
+        </p:txBody>
+      </p:sp>
+      <p:sp>
+        <p:nvSpPr>
+          <p:cNvPr id="13" name="cpe|commentary|text|12"/>
+          <p:cNvSpPr txBox="1"/>
+          <p:nvPr/>
+        </p:nvSpPr>
+        <p:spPr>
+          <a:xfrm>
+            <a:off x="6196432" y="5847016"/>
+            <a:ext cx="5492344" cy="352616"/>
+          </a:xfrm>
+          <a:prstGeom prst="rect">
+            <a:avLst/>
+          </a:prstGeom>
+          <a:noFill/>
+        </p:spPr>
+        <p:txBody>
+          <a:bodyPr wrap="square" lIns="0" rIns="0" tIns="0" bIns="0" anchor="t">
+            <a:noAutofit/>
+          </a:bodyPr>
+          <a:lstStyle/>
+          <a:p>
+            <a:pPr algn="l">
               <a:lnSpc>
-                <a:spcPct val="108000"/>
+                <a:spcPct val="100000"/>
               </a:lnSpc>
-              <a:buClr>
-                <a:srgbClr val="1E252D"/>
-              </a:buClr>
-              <a:buSzPct val="100000"/>
-              <a:buFont typeface="Arial"/>
-              <a:buChar char="•"/>
-            </a:pPr>
-            <a:r>
-              <a:rPr sz="1200" b="0">
+            </a:pPr>
+            <a:r>
+              <a:rPr sz="1450" b="0">
                 <a:solidFill>
                   <a:srgbClr val="1E252D"/>
                 </a:solidFill>
@@ -10302,7 +10318,7 @@
         <p:spPr>
           <a:xfrm>
             <a:off x="502920" y="6272784"/>
-            <a:ext cx="10088575" cy="402336"/>
+            <a:ext cx="8808415" cy="402336"/>
           </a:xfrm>
           <a:prstGeom prst="rect">
             <a:avLst/>
@@ -11007,7 +11023,7 @@
         <p:spPr>
           <a:xfrm>
             <a:off x="502920" y="6272784"/>
-            <a:ext cx="10088575" cy="402336"/>
+            <a:ext cx="8808415" cy="402336"/>
           </a:xfrm>
           <a:prstGeom prst="rect">
             <a:avLst/>
@@ -11085,7 +11101,7 @@
         <p:spPr>
           <a:xfrm>
             <a:off x="502920" y="1481328"/>
-            <a:ext cx="7390181" cy="274320"/>
+            <a:ext cx="11185855" cy="274320"/>
           </a:xfrm>
           <a:prstGeom prst="rect">
             <a:avLst/>
@@ -11134,7 +11150,7 @@
         </p:nvGraphicFramePr>
         <p:xfrm>
           <a:off x="502920" y="1901952"/>
-          <a:ext cx="7390181" cy="4297680"/>
+          <a:ext cx="11185855" cy="3465576"/>
         </p:xfrm>
         <a:graphic>
           <a:graphicData uri="http://schemas.openxmlformats.org/drawingml/2006/chart">
@@ -11150,8 +11166,8 @@
         </p:nvSpPr>
         <p:spPr>
           <a:xfrm>
-            <a:off x="576822" y="2898830"/>
-            <a:ext cx="1231171" cy="237744"/>
+            <a:off x="614779" y="2789586"/>
+            <a:ext cx="1982715" cy="237744"/>
           </a:xfrm>
           <a:prstGeom prst="rect">
             <a:avLst/>
@@ -11189,8 +11205,8 @@
         </p:nvSpPr>
         <p:spPr>
           <a:xfrm>
-            <a:off x="1807993" y="2793854"/>
-            <a:ext cx="1231171" cy="237744"/>
+            <a:off x="2597493" y="2712023"/>
+            <a:ext cx="1982715" cy="237744"/>
           </a:xfrm>
           <a:prstGeom prst="rect">
             <a:avLst/>
@@ -11228,8 +11244,8 @@
         </p:nvSpPr>
         <p:spPr>
           <a:xfrm>
-            <a:off x="3039164" y="2675186"/>
-            <a:ext cx="1231171" cy="237744"/>
+            <a:off x="4580208" y="2624343"/>
+            <a:ext cx="1982715" cy="237744"/>
           </a:xfrm>
           <a:prstGeom prst="rect">
             <a:avLst/>
@@ -11267,8 +11283,8 @@
         </p:nvSpPr>
         <p:spPr>
           <a:xfrm>
-            <a:off x="4270336" y="2554235"/>
-            <a:ext cx="1231171" cy="237744"/>
+            <a:off x="6562923" y="2534976"/>
+            <a:ext cx="1982715" cy="237744"/>
           </a:xfrm>
           <a:prstGeom prst="rect">
             <a:avLst/>
@@ -11306,8 +11322,8 @@
         </p:nvSpPr>
         <p:spPr>
           <a:xfrm>
-            <a:off x="5501507" y="2426439"/>
-            <a:ext cx="1231171" cy="237744"/>
+            <a:off x="8545638" y="2440552"/>
+            <a:ext cx="1982715" cy="237744"/>
           </a:xfrm>
           <a:prstGeom prst="rect">
             <a:avLst/>
@@ -11345,8 +11361,8 @@
         </p:nvSpPr>
         <p:spPr>
           <a:xfrm>
-            <a:off x="6593273" y="2741632"/>
-            <a:ext cx="1299827" cy="237744"/>
+            <a:off x="10248033" y="2714031"/>
+            <a:ext cx="1440742" cy="237744"/>
           </a:xfrm>
           <a:prstGeom prst="rect">
             <a:avLst/>
@@ -11384,8 +11400,8 @@
         </p:nvSpPr>
         <p:spPr>
           <a:xfrm>
-            <a:off x="6593273" y="3061124"/>
-            <a:ext cx="1299827" cy="237744"/>
+            <a:off x="10248033" y="2950092"/>
+            <a:ext cx="1440742" cy="237744"/>
           </a:xfrm>
           <a:prstGeom prst="rect">
             <a:avLst/>
@@ -11423,8 +11439,8 @@
         </p:nvSpPr>
         <p:spPr>
           <a:xfrm>
-            <a:off x="6593273" y="3494719"/>
-            <a:ext cx="1299827" cy="237744"/>
+            <a:off x="10248033" y="3270461"/>
+            <a:ext cx="1440742" cy="237744"/>
           </a:xfrm>
           <a:prstGeom prst="rect">
             <a:avLst/>
@@ -11462,8 +11478,8 @@
         </p:nvSpPr>
         <p:spPr>
           <a:xfrm>
-            <a:off x="6593273" y="4361910"/>
-            <a:ext cx="1299827" cy="237744"/>
+            <a:off x="10248033" y="3911200"/>
+            <a:ext cx="1440742" cy="237744"/>
           </a:xfrm>
           <a:prstGeom prst="rect">
             <a:avLst/>
@@ -11501,8 +11517,8 @@
         </p:nvSpPr>
         <p:spPr>
           <a:xfrm>
-            <a:off x="6593273" y="5388847"/>
-            <a:ext cx="1299827" cy="237744"/>
+            <a:off x="10248033" y="4669969"/>
+            <a:ext cx="1440742" cy="237744"/>
           </a:xfrm>
           <a:prstGeom prst="rect">
             <a:avLst/>
@@ -11540,8 +11556,8 @@
         </p:nvCxnSpPr>
         <p:spPr>
           <a:xfrm>
-            <a:off x="1192407" y="2316711"/>
-            <a:ext cx="4924685" cy="0"/>
+            <a:off x="1606136" y="2330824"/>
+            <a:ext cx="7930859" cy="0"/>
           </a:xfrm>
           <a:prstGeom prst="line">
             <a:avLst/>
@@ -11562,7 +11578,7 @@
         </p:nvCxnSpPr>
         <p:spPr>
           <a:xfrm>
-            <a:off x="1192407" y="2316711"/>
+            <a:off x="1606136" y="2330824"/>
             <a:ext cx="0" cy="91440"/>
           </a:xfrm>
           <a:prstGeom prst="line">
@@ -11583,7 +11599,7 @@
         </p:nvSpPr>
         <p:spPr>
           <a:xfrm>
-            <a:off x="3158595" y="2179551"/>
+            <a:off x="5075410" y="2193664"/>
             <a:ext cx="992311" cy="274320"/>
           </a:xfrm>
           <a:prstGeom prst="rect">
@@ -11624,8 +11640,8 @@
         </p:nvCxnSpPr>
         <p:spPr>
           <a:xfrm>
-            <a:off x="8094269" y="1481328"/>
-            <a:ext cx="0" cy="4718304"/>
+            <a:off x="502920" y="5568696"/>
+            <a:ext cx="11185855" cy="0"/>
           </a:xfrm>
           <a:prstGeom prst="line">
             <a:avLst/>
@@ -11645,8 +11661,8 @@
         </p:nvSpPr>
         <p:spPr>
           <a:xfrm>
-            <a:off x="8322869" y="1481328"/>
-            <a:ext cx="3365906" cy="196596"/>
+            <a:off x="502920" y="5705856"/>
+            <a:ext cx="2645588" cy="493776"/>
           </a:xfrm>
           <a:prstGeom prst="rect">
             <a:avLst/>
@@ -11667,11 +11683,20 @@
             <a:r>
               <a:rPr sz="1200" b="1">
                 <a:solidFill>
-                  <a:srgbClr val="0B1F3A"/>
-                </a:solidFill>
-                <a:latin typeface="Arial"/>
-              </a:rPr>
-              <a:t>What moves the market</a:t>
+                  <a:srgbClr val="1E252D"/>
+                </a:solidFill>
+                <a:latin typeface="Arial"/>
+              </a:rPr>
+              <a:t>Discount</a:t>
+            </a:r>
+            <a:r>
+              <a:rPr sz="1200" b="0">
+                <a:solidFill>
+                  <a:srgbClr val="1E252D"/>
+                </a:solidFill>
+                <a:latin typeface="Arial"/>
+              </a:rPr>
+              <a:t> grows 7.8% a year on price-sensitive households</a:t>
             </a:r>
           </a:p>
         </p:txBody>
@@ -11684,8 +11709,8 @@
         </p:nvSpPr>
         <p:spPr>
           <a:xfrm>
-            <a:off x="8322869" y="1796796"/>
-            <a:ext cx="3365906" cy="4402836"/>
+            <a:off x="3349676" y="5705856"/>
+            <a:ext cx="2645588" cy="493776"/>
           </a:xfrm>
           <a:prstGeom prst="rect">
             <a:avLst/>
@@ -11698,19 +11723,10 @@
           </a:bodyPr>
           <a:lstStyle/>
           <a:p>
-            <a:pPr algn="l" marL="155448" indent="-155448">
+            <a:pPr algn="l">
               <a:lnSpc>
-                <a:spcPct val="108000"/>
+                <a:spcPct val="100000"/>
               </a:lnSpc>
-              <a:spcAft>
-                <a:spcPts val="800"/>
-              </a:spcAft>
-              <a:buClr>
-                <a:srgbClr val="1E252D"/>
-              </a:buClr>
-              <a:buSzPct val="100000"/>
-              <a:buFont typeface="Arial"/>
-              <a:buChar char="•"/>
             </a:pPr>
             <a:r>
               <a:rPr sz="1200" b="1">
@@ -11719,7 +11735,7 @@
                 </a:solidFill>
                 <a:latin typeface="Arial"/>
               </a:rPr>
-              <a:t>Discount</a:t>
+              <a:t>Online</a:t>
             </a:r>
             <a:r>
               <a:rPr sz="1200" b="0">
@@ -11728,23 +11744,37 @@
                 </a:solidFill>
                 <a:latin typeface="Arial"/>
               </a:rPr>
-              <a:t> grows 7.8% a year on price-sensitive households</a:t>
-            </a:r>
-          </a:p>
-          <a:p>
-            <a:pPr algn="l" marL="155448" indent="-155448">
+              <a:t> is small but compounding at 14% a year</a:t>
+            </a:r>
+          </a:p>
+        </p:txBody>
+      </p:sp>
+      <p:sp>
+        <p:nvSpPr>
+          <p:cNvPr id="24" name="cpe|commentary|text|23"/>
+          <p:cNvSpPr txBox="1"/>
+          <p:nvPr/>
+        </p:nvSpPr>
+        <p:spPr>
+          <a:xfrm>
+            <a:off x="6196432" y="5705856"/>
+            <a:ext cx="2645588" cy="493776"/>
+          </a:xfrm>
+          <a:prstGeom prst="rect">
+            <a:avLst/>
+          </a:prstGeom>
+          <a:noFill/>
+        </p:spPr>
+        <p:txBody>
+          <a:bodyPr wrap="square" lIns="0" rIns="0" tIns="0" bIns="0" anchor="t">
+            <a:noAutofit/>
+          </a:bodyPr>
+          <a:lstStyle/>
+          <a:p>
+            <a:pPr algn="l">
               <a:lnSpc>
-                <a:spcPct val="108000"/>
+                <a:spcPct val="100000"/>
               </a:lnSpc>
-              <a:spcAft>
-                <a:spcPts val="800"/>
-              </a:spcAft>
-              <a:buClr>
-                <a:srgbClr val="1E252D"/>
-              </a:buClr>
-              <a:buSzPct val="100000"/>
-              <a:buFont typeface="Arial"/>
-              <a:buChar char="•"/>
             </a:pPr>
             <a:r>
               <a:rPr sz="1200" b="1">
@@ -11753,7 +11783,7 @@
                 </a:solidFill>
                 <a:latin typeface="Arial"/>
               </a:rPr>
-              <a:t>Online</a:t>
+              <a:t>Supermarkets</a:t>
             </a:r>
             <a:r>
               <a:rPr sz="1200" b="0">
@@ -11762,54 +11792,37 @@
                 </a:solidFill>
                 <a:latin typeface="Arial"/>
               </a:rPr>
-              <a:t> is small but compounding at 14% a year</a:t>
-            </a:r>
-          </a:p>
-          <a:p>
-            <a:pPr algn="l" marL="155448" indent="-155448">
+              <a:t> grow at 2%, below food inflation</a:t>
+            </a:r>
+          </a:p>
+        </p:txBody>
+      </p:sp>
+      <p:sp>
+        <p:nvSpPr>
+          <p:cNvPr id="25" name="cpe|commentary|text|24"/>
+          <p:cNvSpPr txBox="1"/>
+          <p:nvPr/>
+        </p:nvSpPr>
+        <p:spPr>
+          <a:xfrm>
+            <a:off x="9043187" y="5705856"/>
+            <a:ext cx="2645588" cy="493776"/>
+          </a:xfrm>
+          <a:prstGeom prst="rect">
+            <a:avLst/>
+          </a:prstGeom>
+          <a:noFill/>
+        </p:spPr>
+        <p:txBody>
+          <a:bodyPr wrap="square" lIns="0" rIns="0" tIns="0" bIns="0" anchor="t">
+            <a:noAutofit/>
+          </a:bodyPr>
+          <a:lstStyle/>
+          <a:p>
+            <a:pPr algn="l">
               <a:lnSpc>
-                <a:spcPct val="108000"/>
+                <a:spcPct val="100000"/>
               </a:lnSpc>
-              <a:spcAft>
-                <a:spcPts val="800"/>
-              </a:spcAft>
-              <a:buClr>
-                <a:srgbClr val="1E252D"/>
-              </a:buClr>
-              <a:buSzPct val="100000"/>
-              <a:buFont typeface="Arial"/>
-              <a:buChar char="•"/>
-            </a:pPr>
-            <a:r>
-              <a:rPr sz="1200" b="1">
-                <a:solidFill>
-                  <a:srgbClr val="1E252D"/>
-                </a:solidFill>
-                <a:latin typeface="Arial"/>
-              </a:rPr>
-              <a:t>Supermarkets</a:t>
-            </a:r>
-            <a:r>
-              <a:rPr sz="1200" b="0">
-                <a:solidFill>
-                  <a:srgbClr val="1E252D"/>
-                </a:solidFill>
-                <a:latin typeface="Arial"/>
-              </a:rPr>
-              <a:t> grow at 2%, below food inflation</a:t>
-            </a:r>
-          </a:p>
-          <a:p>
-            <a:pPr algn="l" marL="155448" indent="-155448">
-              <a:lnSpc>
-                <a:spcPct val="108000"/>
-              </a:lnSpc>
-              <a:buClr>
-                <a:srgbClr val="1E252D"/>
-              </a:buClr>
-              <a:buSzPct val="100000"/>
-              <a:buFont typeface="Arial"/>
-              <a:buChar char="•"/>
             </a:pPr>
             <a:r>
               <a:rPr sz="1200" b="1">
@@ -11937,7 +11950,7 @@
         <p:spPr>
           <a:xfrm>
             <a:off x="502920" y="6272784"/>
-            <a:ext cx="10088575" cy="402336"/>
+            <a:ext cx="8808415" cy="402336"/>
           </a:xfrm>
           <a:prstGeom prst="rect">
             <a:avLst/>
@@ -12603,9 +12616,93 @@
           </a:graphicData>
         </a:graphic>
       </p:graphicFrame>
+      <p:cxnSp>
+        <p:nvCxnSpPr>
+          <p:cNvPr id="23" name="cpe|exhibit|connector|22"/>
+          <p:cNvCxnSpPr/>
+          <p:nvPr/>
+        </p:nvCxnSpPr>
+        <p:spPr>
+          <a:xfrm>
+            <a:off x="6825062" y="4786729"/>
+            <a:ext cx="2484114" cy="0"/>
+          </a:xfrm>
+          <a:prstGeom prst="line">
+            <a:avLst/>
+          </a:prstGeom>
+          <a:ln w="9525">
+            <a:solidFill>
+              <a:srgbClr val="1E252D"/>
+            </a:solidFill>
+            <a:tailEnd type="triangle" w="med" len="med"/>
+          </a:ln>
+        </p:spPr>
+      </p:cxnSp>
+      <p:cxnSp>
+        <p:nvCxnSpPr>
+          <p:cNvPr id="24" name="cpe|exhibit|connector|23"/>
+          <p:cNvCxnSpPr/>
+          <p:nvPr/>
+        </p:nvCxnSpPr>
+        <p:spPr>
+          <a:xfrm>
+            <a:off x="6825062" y="4786729"/>
+            <a:ext cx="0" cy="91440"/>
+          </a:xfrm>
+          <a:prstGeom prst="line">
+            <a:avLst/>
+          </a:prstGeom>
+          <a:ln w="9525">
+            <a:solidFill>
+              <a:srgbClr val="1E252D"/>
+            </a:solidFill>
+          </a:ln>
+        </p:spPr>
+      </p:cxnSp>
+      <p:sp>
+        <p:nvSpPr>
+          <p:cNvPr id="25" name="cpe|exhibit|label|24"/>
+          <p:cNvSpPr txBox="1"/>
+          <p:nvPr/>
+        </p:nvSpPr>
+        <p:spPr>
+          <a:xfrm>
+            <a:off x="7828525" y="4649569"/>
+            <a:ext cx="477187" cy="274320"/>
+          </a:xfrm>
+          <a:prstGeom prst="rect">
+            <a:avLst/>
+          </a:prstGeom>
+          <a:solidFill>
+            <a:srgbClr val="FFFFFF"/>
+          </a:solidFill>
+        </p:spPr>
+        <p:txBody>
+          <a:bodyPr wrap="square" lIns="0" rIns="0" tIns="0" bIns="0" anchor="ctr">
+            <a:noAutofit/>
+          </a:bodyPr>
+          <a:lstStyle/>
+          <a:p>
+            <a:pPr algn="ctr">
+              <a:lnSpc>
+                <a:spcPct val="100000"/>
+              </a:lnSpc>
+            </a:pPr>
+            <a:r>
+              <a:rPr sz="1000" b="1">
+                <a:solidFill>
+                  <a:srgbClr val="1E252D"/>
+                </a:solidFill>
+                <a:latin typeface="Arial"/>
+              </a:rPr>
+              <a:t>+3%</a:t>
+            </a:r>
+          </a:p>
+        </p:txBody>
+      </p:sp>
       <p:graphicFrame>
         <p:nvGraphicFramePr>
-          <p:cNvPr id="23" name="cpe|exhibit|chart|22"/>
+          <p:cNvPr id="26" name="cpe|exhibit|chart|25"/>
           <p:cNvGraphicFramePr>
             <a:graphicFrameLocks noGrp="1"/>
           </p:cNvGraphicFramePr>
@@ -12623,7 +12720,7 @@
       </p:graphicFrame>
       <p:sp>
         <p:nvSpPr>
-          <p:cNvPr id="24" name="cpe|exhibit|label|23"/>
+          <p:cNvPr id="27" name="cpe|exhibit|label|26"/>
           <p:cNvSpPr txBox="1"/>
           <p:nvPr/>
         </p:nvSpPr>
@@ -12662,7 +12759,7 @@
       </p:sp>
       <p:sp>
         <p:nvSpPr>
-          <p:cNvPr id="25" name="cpe|exhibit|label|24"/>
+          <p:cNvPr id="28" name="cpe|exhibit|label|27"/>
           <p:cNvSpPr txBox="1"/>
           <p:nvPr/>
         </p:nvSpPr>
@@ -12701,7 +12798,7 @@
       </p:sp>
       <p:sp>
         <p:nvSpPr>
-          <p:cNvPr id="26" name="cpe|exhibit|label|25"/>
+          <p:cNvPr id="29" name="cpe|exhibit|label|28"/>
           <p:cNvSpPr txBox="1"/>
           <p:nvPr/>
         </p:nvSpPr>
@@ -12740,7 +12837,7 @@
       </p:sp>
       <p:sp>
         <p:nvSpPr>
-          <p:cNvPr id="27" name="cpe|exhibit|label|26"/>
+          <p:cNvPr id="30" name="cpe|exhibit|label|29"/>
           <p:cNvSpPr txBox="1"/>
           <p:nvPr/>
         </p:nvSpPr>
@@ -12779,7 +12876,7 @@
       </p:sp>
       <p:sp>
         <p:nvSpPr>
-          <p:cNvPr id="28" name="cpe|exhibit|label|27"/>
+          <p:cNvPr id="31" name="cpe|exhibit|label|30"/>
           <p:cNvSpPr txBox="1"/>
           <p:nvPr/>
         </p:nvSpPr>
@@ -12818,7 +12915,7 @@
       </p:sp>
       <p:sp>
         <p:nvSpPr>
-          <p:cNvPr id="29" name="cpe|exhibit|label|28"/>
+          <p:cNvPr id="32" name="cpe|exhibit|label|31"/>
           <p:cNvSpPr txBox="1"/>
           <p:nvPr/>
         </p:nvSpPr>
@@ -12857,7 +12954,7 @@
       </p:sp>
       <p:sp>
         <p:nvSpPr>
-          <p:cNvPr id="30" name="cpe|exhibit|label|29"/>
+          <p:cNvPr id="33" name="cpe|exhibit|label|32"/>
           <p:cNvSpPr txBox="1"/>
           <p:nvPr/>
         </p:nvSpPr>
@@ -12896,7 +12993,7 @@
       </p:sp>
       <p:sp>
         <p:nvSpPr>
-          <p:cNvPr id="31" name="cpe|exhibit|label|30"/>
+          <p:cNvPr id="34" name="cpe|exhibit|label|33"/>
           <p:cNvSpPr txBox="1"/>
           <p:nvPr/>
         </p:nvSpPr>
@@ -12935,7 +13032,7 @@
       </p:sp>
       <p:sp>
         <p:nvSpPr>
-          <p:cNvPr id="32" name="cpe|exhibit|label|31"/>
+          <p:cNvPr id="35" name="cpe|exhibit|label|34"/>
           <p:cNvSpPr txBox="1"/>
           <p:nvPr/>
         </p:nvSpPr>
@@ -12974,7 +13071,7 @@
       </p:sp>
       <p:sp>
         <p:nvSpPr>
-          <p:cNvPr id="33" name="cpe|exhibit|label|32"/>
+          <p:cNvPr id="36" name="cpe|exhibit|label|35"/>
           <p:cNvSpPr txBox="1"/>
           <p:nvPr/>
         </p:nvSpPr>
@@ -13116,7 +13213,7 @@
         <p:spPr>
           <a:xfrm>
             <a:off x="502920" y="6272784"/>
-            <a:ext cx="10088575" cy="402336"/>
+            <a:ext cx="8808415" cy="402336"/>
           </a:xfrm>
           <a:prstGeom prst="rect">
             <a:avLst/>
@@ -14893,7 +14990,7 @@
         <p:spPr>
           <a:xfrm>
             <a:off x="502920" y="6272784"/>
-            <a:ext cx="10088575" cy="402336"/>
+            <a:ext cx="8808415" cy="402336"/>
           </a:xfrm>
           <a:prstGeom prst="rect">
             <a:avLst/>
@@ -15883,7 +15980,7 @@
         <p:spPr>
           <a:xfrm>
             <a:off x="502920" y="6272784"/>
-            <a:ext cx="10088575" cy="402336"/>
+            <a:ext cx="8808415" cy="402336"/>
           </a:xfrm>
           <a:prstGeom prst="rect">
             <a:avLst/>
@@ -18092,7 +18189,7 @@
         <p:spPr>
           <a:xfrm>
             <a:off x="502920" y="6272784"/>
-            <a:ext cx="10088575" cy="402336"/>
+            <a:ext cx="8808415" cy="402336"/>
           </a:xfrm>
           <a:prstGeom prst="rect">
             <a:avLst/>
@@ -18170,7 +18267,7 @@
         <p:spPr>
           <a:xfrm>
             <a:off x="502920" y="1481328"/>
-            <a:ext cx="6441262" cy="274320"/>
+            <a:ext cx="11185855" cy="274320"/>
           </a:xfrm>
           <a:prstGeom prst="rect">
             <a:avLst/>
@@ -18218,7 +18315,7 @@
         <p:spPr>
           <a:xfrm>
             <a:off x="640080" y="2267712"/>
-            <a:ext cx="3106331" cy="1773936"/>
+            <a:ext cx="5478628" cy="1357884"/>
           </a:xfrm>
           <a:prstGeom prst="rect">
             <a:avLst/>
@@ -18246,8 +18343,8 @@
         </p:nvSpPr>
         <p:spPr>
           <a:xfrm>
-            <a:off x="3746411" y="2267712"/>
-            <a:ext cx="3106331" cy="1773936"/>
+            <a:off x="6118708" y="2267712"/>
+            <a:ext cx="5478628" cy="1357884"/>
           </a:xfrm>
           <a:prstGeom prst="rect">
             <a:avLst/>
@@ -18275,8 +18372,8 @@
         </p:nvSpPr>
         <p:spPr>
           <a:xfrm>
-            <a:off x="640080" y="4041648"/>
-            <a:ext cx="3106331" cy="1773936"/>
+            <a:off x="640080" y="3625596"/>
+            <a:ext cx="5478628" cy="1357884"/>
           </a:xfrm>
           <a:prstGeom prst="rect">
             <a:avLst/>
@@ -18306,8 +18403,8 @@
         </p:nvSpPr>
         <p:spPr>
           <a:xfrm>
-            <a:off x="3746411" y="4041648"/>
-            <a:ext cx="3106331" cy="1773936"/>
+            <a:off x="6118708" y="3625596"/>
+            <a:ext cx="5478628" cy="1357884"/>
           </a:xfrm>
           <a:prstGeom prst="rect">
             <a:avLst/>
@@ -18336,7 +18433,7 @@
         <p:spPr>
           <a:xfrm>
             <a:off x="731520" y="2340864"/>
-            <a:ext cx="2923451" cy="237744"/>
+            <a:ext cx="5295748" cy="237744"/>
           </a:xfrm>
           <a:prstGeom prst="rect">
             <a:avLst/>
@@ -18374,8 +18471,8 @@
         </p:nvSpPr>
         <p:spPr>
           <a:xfrm>
-            <a:off x="3837851" y="2340864"/>
-            <a:ext cx="2923451" cy="237744"/>
+            <a:off x="6210148" y="2340864"/>
+            <a:ext cx="5295748" cy="237744"/>
           </a:xfrm>
           <a:prstGeom prst="rect">
             <a:avLst/>
@@ -18413,8 +18510,8 @@
         </p:nvSpPr>
         <p:spPr>
           <a:xfrm>
-            <a:off x="731520" y="5504688"/>
-            <a:ext cx="2923451" cy="237744"/>
+            <a:off x="731520" y="4672584"/>
+            <a:ext cx="5295748" cy="237744"/>
           </a:xfrm>
           <a:prstGeom prst="rect">
             <a:avLst/>
@@ -18452,8 +18549,8 @@
         </p:nvSpPr>
         <p:spPr>
           <a:xfrm>
-            <a:off x="3837851" y="5504688"/>
-            <a:ext cx="2923451" cy="237744"/>
+            <a:off x="6210148" y="4672584"/>
+            <a:ext cx="5295748" cy="237744"/>
           </a:xfrm>
           <a:prstGeom prst="rect">
             <a:avLst/>
@@ -18491,8 +18588,8 @@
         </p:nvCxnSpPr>
         <p:spPr>
           <a:xfrm>
-            <a:off x="640080" y="5815584"/>
-            <a:ext cx="6258382" cy="0"/>
+            <a:off x="640080" y="4983480"/>
+            <a:ext cx="11002975" cy="0"/>
           </a:xfrm>
           <a:prstGeom prst="line">
             <a:avLst/>
@@ -18514,7 +18611,7 @@
         <p:spPr>
           <a:xfrm flipV="1">
             <a:off x="640080" y="2221992"/>
-            <a:ext cx="0" cy="3593592"/>
+            <a:ext cx="0" cy="2761488"/>
           </a:xfrm>
           <a:prstGeom prst="line">
             <a:avLst/>
@@ -18535,8 +18632,8 @@
         </p:nvSpPr>
         <p:spPr>
           <a:xfrm>
-            <a:off x="640080" y="5870448"/>
-            <a:ext cx="6212662" cy="274320"/>
+            <a:off x="640080" y="5038344"/>
+            <a:ext cx="10957255" cy="274320"/>
           </a:xfrm>
           <a:prstGeom prst="rect">
             <a:avLst/>
@@ -18613,8 +18710,8 @@
         </p:nvSpPr>
         <p:spPr>
           <a:xfrm>
-            <a:off x="3959594" y="3296595"/>
-            <a:ext cx="567660" cy="567660"/>
+            <a:off x="6778027" y="3055285"/>
+            <a:ext cx="434523" cy="434523"/>
           </a:xfrm>
           <a:prstGeom prst="ellipse">
             <a:avLst/>
@@ -18644,7 +18741,7 @@
         </p:nvSpPr>
         <p:spPr>
           <a:xfrm>
-            <a:off x="4563830" y="3470697"/>
+            <a:off x="7249125" y="3162818"/>
             <a:ext cx="814217" cy="219456"/>
           </a:xfrm>
           <a:prstGeom prst="rect">
@@ -18683,8 +18780,8 @@
         </p:nvSpPr>
         <p:spPr>
           <a:xfrm>
-            <a:off x="5713789" y="4340127"/>
-            <a:ext cx="538362" cy="538362"/>
+            <a:off x="9857271" y="3854071"/>
+            <a:ext cx="412097" cy="412097"/>
           </a:xfrm>
           <a:prstGeom prst="ellipse">
             <a:avLst/>
@@ -18714,7 +18811,7 @@
         </p:nvSpPr>
         <p:spPr>
           <a:xfrm>
-            <a:off x="4870001" y="4499580"/>
+            <a:off x="10305944" y="3950391"/>
             <a:ext cx="807212" cy="219456"/>
           </a:xfrm>
           <a:prstGeom prst="rect">
@@ -18753,8 +18850,8 @@
         </p:nvSpPr>
         <p:spPr>
           <a:xfrm>
-            <a:off x="2242330" y="2928610"/>
-            <a:ext cx="523098" cy="523098"/>
+            <a:off x="3727050" y="2773605"/>
+            <a:ext cx="400413" cy="400413"/>
           </a:xfrm>
           <a:prstGeom prst="ellipse">
             <a:avLst/>
@@ -18784,7 +18881,7 @@
         </p:nvSpPr>
         <p:spPr>
           <a:xfrm>
-            <a:off x="2802004" y="3080431"/>
+            <a:off x="4164039" y="2864084"/>
             <a:ext cx="821222" cy="219456"/>
           </a:xfrm>
           <a:prstGeom prst="rect">
@@ -18823,8 +18920,8 @@
         </p:nvSpPr>
         <p:spPr>
           <a:xfrm>
-            <a:off x="2877744" y="4007120"/>
-            <a:ext cx="494801" cy="494801"/>
+            <a:off x="4833606" y="3599166"/>
+            <a:ext cx="378753" cy="378753"/>
           </a:xfrm>
           <a:prstGeom prst="ellipse">
             <a:avLst/>
@@ -18854,7 +18951,7 @@
         </p:nvSpPr>
         <p:spPr>
           <a:xfrm>
-            <a:off x="3409122" y="4144792"/>
+            <a:off x="5248934" y="3678814"/>
             <a:ext cx="433118" cy="219456"/>
           </a:xfrm>
           <a:prstGeom prst="rect">
@@ -18893,8 +18990,8 @@
         </p:nvSpPr>
         <p:spPr>
           <a:xfrm>
-            <a:off x="4576111" y="2742003"/>
-            <a:ext cx="328653" cy="328653"/>
+            <a:off x="7746083" y="2630764"/>
+            <a:ext cx="251572" cy="251572"/>
           </a:xfrm>
           <a:prstGeom prst="ellipse">
             <a:avLst/>
@@ -18924,7 +19021,7 @@
         </p:nvSpPr>
         <p:spPr>
           <a:xfrm>
-            <a:off x="4941339" y="2796601"/>
+            <a:off x="8034230" y="2646822"/>
             <a:ext cx="1181346" cy="219456"/>
           </a:xfrm>
           <a:prstGeom prst="rect">
@@ -18963,8 +19060,8 @@
         </p:nvCxnSpPr>
         <p:spPr>
           <a:xfrm>
-            <a:off x="7145350" y="1481328"/>
-            <a:ext cx="0" cy="4718304"/>
+            <a:off x="502920" y="5568696"/>
+            <a:ext cx="11185855" cy="0"/>
           </a:xfrm>
           <a:prstGeom prst="line">
             <a:avLst/>
@@ -18984,8 +19081,8 @@
         </p:nvSpPr>
         <p:spPr>
           <a:xfrm>
-            <a:off x="7373950" y="1481328"/>
-            <a:ext cx="4314825" cy="4718304"/>
+            <a:off x="502920" y="5705856"/>
+            <a:ext cx="3594506" cy="493776"/>
           </a:xfrm>
           <a:prstGeom prst="rect">
             <a:avLst/>
@@ -18998,19 +19095,10 @@
           </a:bodyPr>
           <a:lstStyle/>
           <a:p>
-            <a:pPr algn="l" marL="155448" indent="-155448">
+            <a:pPr algn="l">
               <a:lnSpc>
-                <a:spcPct val="108000"/>
+                <a:spcPct val="100000"/>
               </a:lnSpc>
-              <a:spcAft>
-                <a:spcPts val="800"/>
-              </a:spcAft>
-              <a:buClr>
-                <a:srgbClr val="1E252D"/>
-              </a:buClr>
-              <a:buSzPct val="100000"/>
-              <a:buFont typeface="Arial"/>
-              <a:buChar char="•"/>
             </a:pPr>
             <a:r>
               <a:rPr sz="1200" b="0">
@@ -19040,20 +19128,34 @@
               <a:t> Competitor A on a comparable basket</a:t>
             </a:r>
           </a:p>
-          <a:p>
-            <a:pPr algn="l" marL="155448" indent="-155448">
+        </p:txBody>
+      </p:sp>
+      <p:sp>
+        <p:nvSpPr>
+          <p:cNvPr id="31" name="cpe|commentary|text|30"/>
+          <p:cNvSpPr txBox="1"/>
+          <p:nvPr/>
+        </p:nvSpPr>
+        <p:spPr>
+          <a:xfrm>
+            <a:off x="4298594" y="5705856"/>
+            <a:ext cx="3594506" cy="493776"/>
+          </a:xfrm>
+          <a:prstGeom prst="rect">
+            <a:avLst/>
+          </a:prstGeom>
+          <a:noFill/>
+        </p:spPr>
+        <p:txBody>
+          <a:bodyPr wrap="square" lIns="0" rIns="0" tIns="0" bIns="0" anchor="t">
+            <a:noAutofit/>
+          </a:bodyPr>
+          <a:lstStyle/>
+          <a:p>
+            <a:pPr algn="l">
               <a:lnSpc>
-                <a:spcPct val="108000"/>
+                <a:spcPct val="100000"/>
               </a:lnSpc>
-              <a:spcAft>
-                <a:spcPts val="800"/>
-              </a:spcAft>
-              <a:buClr>
-                <a:srgbClr val="1E252D"/>
-              </a:buClr>
-              <a:buSzPct val="100000"/>
-              <a:buFont typeface="Arial"/>
-              <a:buChar char="•"/>
             </a:pPr>
             <a:r>
               <a:rPr sz="1200" b="0">
@@ -19065,17 +19167,34 @@
               <a:t>Its experience score trails B and C on freshness and queues</a:t>
             </a:r>
           </a:p>
-          <a:p>
-            <a:pPr algn="l" marL="155448" indent="-155448">
+        </p:txBody>
+      </p:sp>
+      <p:sp>
+        <p:nvSpPr>
+          <p:cNvPr id="32" name="cpe|commentary|text|31"/>
+          <p:cNvSpPr txBox="1"/>
+          <p:nvPr/>
+        </p:nvSpPr>
+        <p:spPr>
+          <a:xfrm>
+            <a:off x="8094269" y="5705856"/>
+            <a:ext cx="3594506" cy="493776"/>
+          </a:xfrm>
+          <a:prstGeom prst="rect">
+            <a:avLst/>
+          </a:prstGeom>
+          <a:noFill/>
+        </p:spPr>
+        <p:txBody>
+          <a:bodyPr wrap="square" lIns="0" rIns="0" tIns="0" bIns="0" anchor="t">
+            <a:noAutofit/>
+          </a:bodyPr>
+          <a:lstStyle/>
+          <a:p>
+            <a:pPr algn="l">
               <a:lnSpc>
-                <a:spcPct val="108000"/>
+                <a:spcPct val="100000"/>
               </a:lnSpc>
-              <a:buClr>
-                <a:srgbClr val="1E252D"/>
-              </a:buClr>
-              <a:buSzPct val="100000"/>
-              <a:buFont typeface="Arial"/>
-              <a:buChar char="•"/>
             </a:pPr>
             <a:r>
               <a:rPr sz="1200" b="0">
@@ -19194,7 +19313,7 @@
         <p:spPr>
           <a:xfrm>
             <a:off x="502920" y="6272784"/>
-            <a:ext cx="10088575" cy="402336"/>
+            <a:ext cx="8808415" cy="402336"/>
           </a:xfrm>
           <a:prstGeom prst="rect">
             <a:avLst/>

--- a/examples/alvora/output/2_final/deck.pptx
+++ b/examples/alvora/output/2_final/deck.pptx
@@ -131,9 +131,9 @@
           <c:xMode val="edge"/>
           <c:yMode val="edge"/>
           <c:x val="0.01"/>
-          <c:y val="0.01319"/>
+          <c:y val="0.01422"/>
           <c:w val="0.88626"/>
-          <c:h val="0.91227"/>
+          <c:h val="0.90541"/>
         </c:manualLayout>
       </c:layout>
       <c:barChart>
@@ -6444,7 +6444,7 @@
         <p:spPr>
           <a:xfrm>
             <a:off x="502920" y="475488"/>
-            <a:ext cx="6382527" cy="786384"/>
+            <a:ext cx="10966399" cy="786384"/>
           </a:xfrm>
           <a:prstGeom prst="rect">
             <a:avLst/>
@@ -8269,7 +8269,7 @@
         <p:spPr>
           <a:xfrm>
             <a:off x="502920" y="475488"/>
-            <a:ext cx="6635743" cy="786384"/>
+            <a:ext cx="10527487" cy="786384"/>
           </a:xfrm>
           <a:prstGeom prst="rect">
             <a:avLst/>
@@ -10279,7 +10279,7 @@
         <p:spPr>
           <a:xfrm>
             <a:off x="502920" y="475488"/>
-            <a:ext cx="6382527" cy="786384"/>
+            <a:ext cx="10500055" cy="786384"/>
           </a:xfrm>
           <a:prstGeom prst="rect">
             <a:avLst/>
@@ -11150,7 +11150,7 @@
         </p:nvGraphicFramePr>
         <p:xfrm>
           <a:off x="502920" y="1901952"/>
-          <a:ext cx="11185855" cy="3465576"/>
+          <a:ext cx="11185855" cy="3214116"/>
         </p:xfrm>
         <a:graphic>
           <a:graphicData uri="http://schemas.openxmlformats.org/drawingml/2006/chart">
@@ -11166,7 +11166,7 @@
         </p:nvSpPr>
         <p:spPr>
           <a:xfrm>
-            <a:off x="614779" y="2789586"/>
+            <a:off x="614779" y="2700804"/>
             <a:ext cx="1982715" cy="237744"/>
           </a:xfrm>
           <a:prstGeom prst="rect">
@@ -11205,7 +11205,7 @@
         </p:nvSpPr>
         <p:spPr>
           <a:xfrm>
-            <a:off x="2597493" y="2712023"/>
+            <a:off x="2597493" y="2629410"/>
             <a:ext cx="1982715" cy="237744"/>
           </a:xfrm>
           <a:prstGeom prst="rect">
@@ -11244,7 +11244,7 @@
         </p:nvSpPr>
         <p:spPr>
           <a:xfrm>
-            <a:off x="4580208" y="2624343"/>
+            <a:off x="4580208" y="2548703"/>
             <a:ext cx="1982715" cy="237744"/>
           </a:xfrm>
           <a:prstGeom prst="rect">
@@ -11283,7 +11283,7 @@
         </p:nvSpPr>
         <p:spPr>
           <a:xfrm>
-            <a:off x="6562923" y="2534976"/>
+            <a:off x="6562923" y="2466445"/>
             <a:ext cx="1982715" cy="237744"/>
           </a:xfrm>
           <a:prstGeom prst="rect">
@@ -11322,7 +11322,7 @@
         </p:nvSpPr>
         <p:spPr>
           <a:xfrm>
-            <a:off x="8545638" y="2440552"/>
+            <a:off x="8545638" y="2379531"/>
             <a:ext cx="1982715" cy="237744"/>
           </a:xfrm>
           <a:prstGeom prst="rect">
@@ -11361,7 +11361,7 @@
         </p:nvSpPr>
         <p:spPr>
           <a:xfrm>
-            <a:off x="10248033" y="2714031"/>
+            <a:off x="10248033" y="2643622"/>
             <a:ext cx="1440742" cy="237744"/>
           </a:xfrm>
           <a:prstGeom prst="rect">
@@ -11400,7 +11400,7 @@
         </p:nvSpPr>
         <p:spPr>
           <a:xfrm>
-            <a:off x="10248033" y="2950092"/>
+            <a:off x="10248033" y="2863078"/>
             <a:ext cx="1440742" cy="237744"/>
           </a:xfrm>
           <a:prstGeom prst="rect">
@@ -11439,7 +11439,7 @@
         </p:nvSpPr>
         <p:spPr>
           <a:xfrm>
-            <a:off x="10248033" y="3270461"/>
+            <a:off x="10248033" y="3155796"/>
             <a:ext cx="1440742" cy="237744"/>
           </a:xfrm>
           <a:prstGeom prst="rect">
@@ -11478,7 +11478,7 @@
         </p:nvSpPr>
         <p:spPr>
           <a:xfrm>
-            <a:off x="10248033" y="3911200"/>
+            <a:off x="10248033" y="3745571"/>
             <a:ext cx="1440742" cy="237744"/>
           </a:xfrm>
           <a:prstGeom prst="rect">
@@ -11517,7 +11517,7 @@
         </p:nvSpPr>
         <p:spPr>
           <a:xfrm>
-            <a:off x="10248033" y="4669969"/>
+            <a:off x="10248033" y="4443990"/>
             <a:ext cx="1440742" cy="237744"/>
           </a:xfrm>
           <a:prstGeom prst="rect">
@@ -11556,7 +11556,7 @@
         </p:nvCxnSpPr>
         <p:spPr>
           <a:xfrm>
-            <a:off x="1606136" y="2330824"/>
+            <a:off x="1606136" y="2269803"/>
             <a:ext cx="7930859" cy="0"/>
           </a:xfrm>
           <a:prstGeom prst="line">
@@ -11578,7 +11578,7 @@
         </p:nvCxnSpPr>
         <p:spPr>
           <a:xfrm>
-            <a:off x="1606136" y="2330824"/>
+            <a:off x="1606136" y="2269803"/>
             <a:ext cx="0" cy="91440"/>
           </a:xfrm>
           <a:prstGeom prst="line">
@@ -11599,7 +11599,7 @@
         </p:nvSpPr>
         <p:spPr>
           <a:xfrm>
-            <a:off x="5075410" y="2193664"/>
+            <a:off x="5075410" y="2132643"/>
             <a:ext cx="992311" cy="274320"/>
           </a:xfrm>
           <a:prstGeom prst="rect">
@@ -11632,9 +11632,48 @@
           </a:p>
         </p:txBody>
       </p:sp>
+      <p:sp>
+        <p:nvSpPr>
+          <p:cNvPr id="21" name="cpe|commentary|text|20"/>
+          <p:cNvSpPr txBox="1"/>
+          <p:nvPr/>
+        </p:nvSpPr>
+        <p:spPr>
+          <a:xfrm>
+            <a:off x="502920" y="5317236"/>
+            <a:ext cx="11185855" cy="196596"/>
+          </a:xfrm>
+          <a:prstGeom prst="rect">
+            <a:avLst/>
+          </a:prstGeom>
+          <a:noFill/>
+        </p:spPr>
+        <p:txBody>
+          <a:bodyPr wrap="square" lIns="0" rIns="0" tIns="0" bIns="0" anchor="t">
+            <a:noAutofit/>
+          </a:bodyPr>
+          <a:lstStyle/>
+          <a:p>
+            <a:pPr algn="l">
+              <a:lnSpc>
+                <a:spcPct val="100000"/>
+              </a:lnSpc>
+            </a:pPr>
+            <a:r>
+              <a:rPr sz="1200" b="1">
+                <a:solidFill>
+                  <a:srgbClr val="0B1F3A"/>
+                </a:solidFill>
+                <a:latin typeface="Arial"/>
+              </a:rPr>
+              <a:t>What moves the market</a:t>
+            </a:r>
+          </a:p>
+        </p:txBody>
+      </p:sp>
       <p:cxnSp>
         <p:nvCxnSpPr>
-          <p:cNvPr id="21" name="cpe|commentary|line|20"/>
+          <p:cNvPr id="22" name="cpe|commentary|line|21"/>
           <p:cNvCxnSpPr/>
           <p:nvPr/>
         </p:nvCxnSpPr>
@@ -11655,7 +11694,7 @@
       </p:cxnSp>
       <p:sp>
         <p:nvSpPr>
-          <p:cNvPr id="22" name="cpe|commentary|text|21"/>
+          <p:cNvPr id="23" name="cpe|commentary|text|22"/>
           <p:cNvSpPr txBox="1"/>
           <p:nvPr/>
         </p:nvSpPr>
@@ -11703,7 +11742,7 @@
       </p:sp>
       <p:sp>
         <p:nvSpPr>
-          <p:cNvPr id="23" name="cpe|commentary|text|22"/>
+          <p:cNvPr id="24" name="cpe|commentary|text|23"/>
           <p:cNvSpPr txBox="1"/>
           <p:nvPr/>
         </p:nvSpPr>
@@ -11751,7 +11790,7 @@
       </p:sp>
       <p:sp>
         <p:nvSpPr>
-          <p:cNvPr id="24" name="cpe|commentary|text|23"/>
+          <p:cNvPr id="25" name="cpe|commentary|text|24"/>
           <p:cNvSpPr txBox="1"/>
           <p:nvPr/>
         </p:nvSpPr>
@@ -11799,7 +11838,7 @@
       </p:sp>
       <p:sp>
         <p:nvSpPr>
-          <p:cNvPr id="25" name="cpe|commentary|text|24"/>
+          <p:cNvPr id="26" name="cpe|commentary|text|25"/>
           <p:cNvSpPr txBox="1"/>
           <p:nvPr/>
         </p:nvSpPr>
@@ -11911,7 +11950,7 @@
         <p:spPr>
           <a:xfrm>
             <a:off x="502920" y="475488"/>
-            <a:ext cx="6382527" cy="786384"/>
+            <a:ext cx="10417759" cy="786384"/>
           </a:xfrm>
           <a:prstGeom prst="rect">
             <a:avLst/>
@@ -13174,7 +13213,7 @@
         <p:spPr>
           <a:xfrm>
             <a:off x="502920" y="475488"/>
-            <a:ext cx="6382527" cy="786384"/>
+            <a:ext cx="10472623" cy="786384"/>
           </a:xfrm>
           <a:prstGeom prst="rect">
             <a:avLst/>
@@ -18150,7 +18189,7 @@
         <p:spPr>
           <a:xfrm>
             <a:off x="502920" y="475488"/>
-            <a:ext cx="6382527" cy="786384"/>
+            <a:ext cx="10774375" cy="786384"/>
           </a:xfrm>
           <a:prstGeom prst="rect">
             <a:avLst/>
@@ -19274,7 +19313,7 @@
         <p:spPr>
           <a:xfrm>
             <a:off x="502920" y="475488"/>
-            <a:ext cx="6382527" cy="786384"/>
+            <a:ext cx="10445191" cy="786384"/>
           </a:xfrm>
           <a:prstGeom prst="rect">
             <a:avLst/>

--- a/examples/alvora/output/2_final/deck.pptx
+++ b/examples/alvora/output/2_final/deck.pptx
@@ -131,9 +131,9 @@
           <c:xMode val="edge"/>
           <c:yMode val="edge"/>
           <c:x val="0.01"/>
-          <c:y val="0.01422"/>
-          <c:w val="0.88626"/>
-          <c:h val="0.90541"/>
+          <c:y val="0.01064"/>
+          <c:w val="0.83298"/>
+          <c:h val="0.92926"/>
         </c:manualLayout>
       </c:layout>
       <c:barChart>
@@ -670,7 +670,7 @@
       <c:valAx>
         <c:axId val="-2113994440"/>
         <c:scaling>
-          <c:max val="187.5"/>
+          <c:max val="175.0"/>
           <c:min val="0.0"/>
         </c:scaling>
         <c:delete/>
@@ -11101,7 +11101,7 @@
         <p:spPr>
           <a:xfrm>
             <a:off x="502920" y="1481328"/>
-            <a:ext cx="11185855" cy="274320"/>
+            <a:ext cx="7390181" cy="274320"/>
           </a:xfrm>
           <a:prstGeom prst="rect">
             <a:avLst/>
@@ -11150,7 +11150,7 @@
         </p:nvGraphicFramePr>
         <p:xfrm>
           <a:off x="502920" y="1901952"/>
-          <a:ext cx="11185855" cy="3214116"/>
+          <a:ext cx="7390181" cy="4297680"/>
         </p:xfrm>
         <a:graphic>
           <a:graphicData uri="http://schemas.openxmlformats.org/drawingml/2006/chart">
@@ -11166,8 +11166,8 @@
         </p:nvSpPr>
         <p:spPr>
           <a:xfrm>
-            <a:off x="614779" y="2700804"/>
-            <a:ext cx="1982715" cy="237744"/>
+            <a:off x="576822" y="2898830"/>
+            <a:ext cx="1231171" cy="237744"/>
           </a:xfrm>
           <a:prstGeom prst="rect">
             <a:avLst/>
@@ -11205,8 +11205,8 @@
         </p:nvSpPr>
         <p:spPr>
           <a:xfrm>
-            <a:off x="2597493" y="2629410"/>
-            <a:ext cx="1982715" cy="237744"/>
+            <a:off x="1807993" y="2793854"/>
+            <a:ext cx="1231171" cy="237744"/>
           </a:xfrm>
           <a:prstGeom prst="rect">
             <a:avLst/>
@@ -11244,8 +11244,8 @@
         </p:nvSpPr>
         <p:spPr>
           <a:xfrm>
-            <a:off x="4580208" y="2548703"/>
-            <a:ext cx="1982715" cy="237744"/>
+            <a:off x="3039164" y="2675186"/>
+            <a:ext cx="1231171" cy="237744"/>
           </a:xfrm>
           <a:prstGeom prst="rect">
             <a:avLst/>
@@ -11283,8 +11283,8 @@
         </p:nvSpPr>
         <p:spPr>
           <a:xfrm>
-            <a:off x="6562923" y="2466445"/>
-            <a:ext cx="1982715" cy="237744"/>
+            <a:off x="4270336" y="2554235"/>
+            <a:ext cx="1231171" cy="237744"/>
           </a:xfrm>
           <a:prstGeom prst="rect">
             <a:avLst/>
@@ -11322,8 +11322,8 @@
         </p:nvSpPr>
         <p:spPr>
           <a:xfrm>
-            <a:off x="8545638" y="2379531"/>
-            <a:ext cx="1982715" cy="237744"/>
+            <a:off x="5501507" y="2426439"/>
+            <a:ext cx="1231171" cy="237744"/>
           </a:xfrm>
           <a:prstGeom prst="rect">
             <a:avLst/>
@@ -11361,8 +11361,8 @@
         </p:nvSpPr>
         <p:spPr>
           <a:xfrm>
-            <a:off x="10248033" y="2643622"/>
-            <a:ext cx="1440742" cy="237744"/>
+            <a:off x="6593273" y="2741632"/>
+            <a:ext cx="1299827" cy="237744"/>
           </a:xfrm>
           <a:prstGeom prst="rect">
             <a:avLst/>
@@ -11400,8 +11400,8 @@
         </p:nvSpPr>
         <p:spPr>
           <a:xfrm>
-            <a:off x="10248033" y="2863078"/>
-            <a:ext cx="1440742" cy="237744"/>
+            <a:off x="6593273" y="3061124"/>
+            <a:ext cx="1299827" cy="237744"/>
           </a:xfrm>
           <a:prstGeom prst="rect">
             <a:avLst/>
@@ -11439,8 +11439,8 @@
         </p:nvSpPr>
         <p:spPr>
           <a:xfrm>
-            <a:off x="10248033" y="3155796"/>
-            <a:ext cx="1440742" cy="237744"/>
+            <a:off x="6593273" y="3494719"/>
+            <a:ext cx="1299827" cy="237744"/>
           </a:xfrm>
           <a:prstGeom prst="rect">
             <a:avLst/>
@@ -11478,8 +11478,8 @@
         </p:nvSpPr>
         <p:spPr>
           <a:xfrm>
-            <a:off x="10248033" y="3745571"/>
-            <a:ext cx="1440742" cy="237744"/>
+            <a:off x="6593273" y="4361910"/>
+            <a:ext cx="1299827" cy="237744"/>
           </a:xfrm>
           <a:prstGeom prst="rect">
             <a:avLst/>
@@ -11517,8 +11517,8 @@
         </p:nvSpPr>
         <p:spPr>
           <a:xfrm>
-            <a:off x="10248033" y="4443990"/>
-            <a:ext cx="1440742" cy="237744"/>
+            <a:off x="6593273" y="5388847"/>
+            <a:ext cx="1299827" cy="237744"/>
           </a:xfrm>
           <a:prstGeom prst="rect">
             <a:avLst/>
@@ -11556,8 +11556,8 @@
         </p:nvCxnSpPr>
         <p:spPr>
           <a:xfrm>
-            <a:off x="1606136" y="2269803"/>
-            <a:ext cx="7930859" cy="0"/>
+            <a:off x="1192407" y="2316711"/>
+            <a:ext cx="4924685" cy="0"/>
           </a:xfrm>
           <a:prstGeom prst="line">
             <a:avLst/>
@@ -11578,7 +11578,7 @@
         </p:nvCxnSpPr>
         <p:spPr>
           <a:xfrm>
-            <a:off x="1606136" y="2269803"/>
+            <a:off x="1192407" y="2316711"/>
             <a:ext cx="0" cy="91440"/>
           </a:xfrm>
           <a:prstGeom prst="line">
@@ -11599,7 +11599,7 @@
         </p:nvSpPr>
         <p:spPr>
           <a:xfrm>
-            <a:off x="5075410" y="2132643"/>
+            <a:off x="3158595" y="2179551"/>
             <a:ext cx="992311" cy="274320"/>
           </a:xfrm>
           <a:prstGeom prst="rect">
@@ -11632,55 +11632,16 @@
           </a:p>
         </p:txBody>
       </p:sp>
-      <p:sp>
-        <p:nvSpPr>
-          <p:cNvPr id="21" name="cpe|commentary|text|20"/>
-          <p:cNvSpPr txBox="1"/>
-          <p:nvPr/>
-        </p:nvSpPr>
-        <p:spPr>
-          <a:xfrm>
-            <a:off x="502920" y="5317236"/>
-            <a:ext cx="11185855" cy="196596"/>
-          </a:xfrm>
-          <a:prstGeom prst="rect">
-            <a:avLst/>
-          </a:prstGeom>
-          <a:noFill/>
-        </p:spPr>
-        <p:txBody>
-          <a:bodyPr wrap="square" lIns="0" rIns="0" tIns="0" bIns="0" anchor="t">
-            <a:noAutofit/>
-          </a:bodyPr>
-          <a:lstStyle/>
-          <a:p>
-            <a:pPr algn="l">
-              <a:lnSpc>
-                <a:spcPct val="100000"/>
-              </a:lnSpc>
-            </a:pPr>
-            <a:r>
-              <a:rPr sz="1200" b="1">
-                <a:solidFill>
-                  <a:srgbClr val="0B1F3A"/>
-                </a:solidFill>
-                <a:latin typeface="Arial"/>
-              </a:rPr>
-              <a:t>What moves the market</a:t>
-            </a:r>
-          </a:p>
-        </p:txBody>
-      </p:sp>
       <p:cxnSp>
         <p:nvCxnSpPr>
-          <p:cNvPr id="22" name="cpe|commentary|line|21"/>
+          <p:cNvPr id="21" name="cpe|commentary|line|20"/>
           <p:cNvCxnSpPr/>
           <p:nvPr/>
         </p:nvCxnSpPr>
         <p:spPr>
           <a:xfrm>
-            <a:off x="502920" y="5568696"/>
-            <a:ext cx="11185855" cy="0"/>
+            <a:off x="8094269" y="1481328"/>
+            <a:ext cx="0" cy="4718304"/>
           </a:xfrm>
           <a:prstGeom prst="line">
             <a:avLst/>
@@ -11694,14 +11655,14 @@
       </p:cxnSp>
       <p:sp>
         <p:nvSpPr>
-          <p:cNvPr id="23" name="cpe|commentary|text|22"/>
+          <p:cNvPr id="22" name="cpe|commentary|text|21"/>
           <p:cNvSpPr txBox="1"/>
           <p:nvPr/>
         </p:nvSpPr>
         <p:spPr>
           <a:xfrm>
-            <a:off x="502920" y="5705856"/>
-            <a:ext cx="2645588" cy="493776"/>
+            <a:off x="8322869" y="1481328"/>
+            <a:ext cx="3365906" cy="196596"/>
           </a:xfrm>
           <a:prstGeom prst="rect">
             <a:avLst/>
@@ -11722,34 +11683,25 @@
             <a:r>
               <a:rPr sz="1200" b="1">
                 <a:solidFill>
-                  <a:srgbClr val="1E252D"/>
-                </a:solidFill>
-                <a:latin typeface="Arial"/>
-              </a:rPr>
-              <a:t>Discount</a:t>
-            </a:r>
-            <a:r>
-              <a:rPr sz="1200" b="0">
-                <a:solidFill>
-                  <a:srgbClr val="1E252D"/>
-                </a:solidFill>
-                <a:latin typeface="Arial"/>
-              </a:rPr>
-              <a:t> grows 7.8% a year on price-sensitive households</a:t>
-            </a:r>
-          </a:p>
-        </p:txBody>
-      </p:sp>
-      <p:sp>
-        <p:nvSpPr>
-          <p:cNvPr id="24" name="cpe|commentary|text|23"/>
+                  <a:srgbClr val="0B1F3A"/>
+                </a:solidFill>
+                <a:latin typeface="Arial"/>
+              </a:rPr>
+              <a:t>What moves the market</a:t>
+            </a:r>
+          </a:p>
+        </p:txBody>
+      </p:sp>
+      <p:sp>
+        <p:nvSpPr>
+          <p:cNvPr id="23" name="cpe|commentary|text|22"/>
           <p:cNvSpPr txBox="1"/>
           <p:nvPr/>
         </p:nvSpPr>
         <p:spPr>
           <a:xfrm>
-            <a:off x="3349676" y="5705856"/>
-            <a:ext cx="2645588" cy="493776"/>
+            <a:off x="8322869" y="1796796"/>
+            <a:ext cx="3365906" cy="4402836"/>
           </a:xfrm>
           <a:prstGeom prst="rect">
             <a:avLst/>
@@ -11762,10 +11714,19 @@
           </a:bodyPr>
           <a:lstStyle/>
           <a:p>
-            <a:pPr algn="l">
+            <a:pPr algn="l" marL="155448" indent="-155448">
               <a:lnSpc>
-                <a:spcPct val="100000"/>
+                <a:spcPct val="108000"/>
               </a:lnSpc>
+              <a:spcAft>
+                <a:spcPts val="800"/>
+              </a:spcAft>
+              <a:buClr>
+                <a:srgbClr val="1E252D"/>
+              </a:buClr>
+              <a:buSzPct val="100000"/>
+              <a:buFont typeface="Arial"/>
+              <a:buChar char="•"/>
             </a:pPr>
             <a:r>
               <a:rPr sz="1200" b="1">
@@ -11774,6 +11735,40 @@
                 </a:solidFill>
                 <a:latin typeface="Arial"/>
               </a:rPr>
+              <a:t>Discount</a:t>
+            </a:r>
+            <a:r>
+              <a:rPr sz="1200" b="0">
+                <a:solidFill>
+                  <a:srgbClr val="1E252D"/>
+                </a:solidFill>
+                <a:latin typeface="Arial"/>
+              </a:rPr>
+              <a:t> grows 7.8% a year on price-sensitive households</a:t>
+            </a:r>
+          </a:p>
+          <a:p>
+            <a:pPr algn="l" marL="155448" indent="-155448">
+              <a:lnSpc>
+                <a:spcPct val="108000"/>
+              </a:lnSpc>
+              <a:spcAft>
+                <a:spcPts val="800"/>
+              </a:spcAft>
+              <a:buClr>
+                <a:srgbClr val="1E252D"/>
+              </a:buClr>
+              <a:buSzPct val="100000"/>
+              <a:buFont typeface="Arial"/>
+              <a:buChar char="•"/>
+            </a:pPr>
+            <a:r>
+              <a:rPr sz="1200" b="1">
+                <a:solidFill>
+                  <a:srgbClr val="1E252D"/>
+                </a:solidFill>
+                <a:latin typeface="Arial"/>
+              </a:rPr>
               <a:t>Online</a:t>
             </a:r>
             <a:r>
@@ -11786,34 +11781,20 @@
               <a:t> is small but compounding at 14% a year</a:t>
             </a:r>
           </a:p>
-        </p:txBody>
-      </p:sp>
-      <p:sp>
-        <p:nvSpPr>
-          <p:cNvPr id="25" name="cpe|commentary|text|24"/>
-          <p:cNvSpPr txBox="1"/>
-          <p:nvPr/>
-        </p:nvSpPr>
-        <p:spPr>
-          <a:xfrm>
-            <a:off x="6196432" y="5705856"/>
-            <a:ext cx="2645588" cy="493776"/>
-          </a:xfrm>
-          <a:prstGeom prst="rect">
-            <a:avLst/>
-          </a:prstGeom>
-          <a:noFill/>
-        </p:spPr>
-        <p:txBody>
-          <a:bodyPr wrap="square" lIns="0" rIns="0" tIns="0" bIns="0" anchor="t">
-            <a:noAutofit/>
-          </a:bodyPr>
-          <a:lstStyle/>
-          <a:p>
-            <a:pPr algn="l">
+          <a:p>
+            <a:pPr algn="l" marL="155448" indent="-155448">
               <a:lnSpc>
-                <a:spcPct val="100000"/>
+                <a:spcPct val="108000"/>
               </a:lnSpc>
+              <a:spcAft>
+                <a:spcPts val="800"/>
+              </a:spcAft>
+              <a:buClr>
+                <a:srgbClr val="1E252D"/>
+              </a:buClr>
+              <a:buSzPct val="100000"/>
+              <a:buFont typeface="Arial"/>
+              <a:buChar char="•"/>
             </a:pPr>
             <a:r>
               <a:rPr sz="1200" b="1">
@@ -11834,34 +11815,17 @@
               <a:t> grow at 2%, below food inflation</a:t>
             </a:r>
           </a:p>
-        </p:txBody>
-      </p:sp>
-      <p:sp>
-        <p:nvSpPr>
-          <p:cNvPr id="26" name="cpe|commentary|text|25"/>
-          <p:cNvSpPr txBox="1"/>
-          <p:nvPr/>
-        </p:nvSpPr>
-        <p:spPr>
-          <a:xfrm>
-            <a:off x="9043187" y="5705856"/>
-            <a:ext cx="2645588" cy="493776"/>
-          </a:xfrm>
-          <a:prstGeom prst="rect">
-            <a:avLst/>
-          </a:prstGeom>
-          <a:noFill/>
-        </p:spPr>
-        <p:txBody>
-          <a:bodyPr wrap="square" lIns="0" rIns="0" tIns="0" bIns="0" anchor="t">
-            <a:noAutofit/>
-          </a:bodyPr>
-          <a:lstStyle/>
-          <a:p>
-            <a:pPr algn="l">
+          <a:p>
+            <a:pPr algn="l" marL="155448" indent="-155448">
               <a:lnSpc>
-                <a:spcPct val="100000"/>
+                <a:spcPct val="108000"/>
               </a:lnSpc>
+              <a:buClr>
+                <a:srgbClr val="1E252D"/>
+              </a:buClr>
+              <a:buSzPct val="100000"/>
+              <a:buFont typeface="Arial"/>
+              <a:buChar char="•"/>
             </a:pPr>
             <a:r>
               <a:rPr sz="1200" b="1">
@@ -18306,7 +18270,7 @@
         <p:spPr>
           <a:xfrm>
             <a:off x="502920" y="1481328"/>
-            <a:ext cx="11185855" cy="274320"/>
+            <a:ext cx="6441262" cy="274320"/>
           </a:xfrm>
           <a:prstGeom prst="rect">
             <a:avLst/>
@@ -18354,7 +18318,7 @@
         <p:spPr>
           <a:xfrm>
             <a:off x="640080" y="2267712"/>
-            <a:ext cx="5478628" cy="1357884"/>
+            <a:ext cx="3106331" cy="1773936"/>
           </a:xfrm>
           <a:prstGeom prst="rect">
             <a:avLst/>
@@ -18382,8 +18346,8 @@
         </p:nvSpPr>
         <p:spPr>
           <a:xfrm>
-            <a:off x="6118708" y="2267712"/>
-            <a:ext cx="5478628" cy="1357884"/>
+            <a:off x="3746411" y="2267712"/>
+            <a:ext cx="3106331" cy="1773936"/>
           </a:xfrm>
           <a:prstGeom prst="rect">
             <a:avLst/>
@@ -18411,8 +18375,8 @@
         </p:nvSpPr>
         <p:spPr>
           <a:xfrm>
-            <a:off x="640080" y="3625596"/>
-            <a:ext cx="5478628" cy="1357884"/>
+            <a:off x="640080" y="4041648"/>
+            <a:ext cx="3106331" cy="1773936"/>
           </a:xfrm>
           <a:prstGeom prst="rect">
             <a:avLst/>
@@ -18442,8 +18406,8 @@
         </p:nvSpPr>
         <p:spPr>
           <a:xfrm>
-            <a:off x="6118708" y="3625596"/>
-            <a:ext cx="5478628" cy="1357884"/>
+            <a:off x="3746411" y="4041648"/>
+            <a:ext cx="3106331" cy="1773936"/>
           </a:xfrm>
           <a:prstGeom prst="rect">
             <a:avLst/>
@@ -18472,7 +18436,7 @@
         <p:spPr>
           <a:xfrm>
             <a:off x="731520" y="2340864"/>
-            <a:ext cx="5295748" cy="237744"/>
+            <a:ext cx="2923451" cy="237744"/>
           </a:xfrm>
           <a:prstGeom prst="rect">
             <a:avLst/>
@@ -18510,8 +18474,8 @@
         </p:nvSpPr>
         <p:spPr>
           <a:xfrm>
-            <a:off x="6210148" y="2340864"/>
-            <a:ext cx="5295748" cy="237744"/>
+            <a:off x="3837851" y="2340864"/>
+            <a:ext cx="2923451" cy="237744"/>
           </a:xfrm>
           <a:prstGeom prst="rect">
             <a:avLst/>
@@ -18549,8 +18513,8 @@
         </p:nvSpPr>
         <p:spPr>
           <a:xfrm>
-            <a:off x="731520" y="4672584"/>
-            <a:ext cx="5295748" cy="237744"/>
+            <a:off x="731520" y="5504688"/>
+            <a:ext cx="2923451" cy="237744"/>
           </a:xfrm>
           <a:prstGeom prst="rect">
             <a:avLst/>
@@ -18588,8 +18552,8 @@
         </p:nvSpPr>
         <p:spPr>
           <a:xfrm>
-            <a:off x="6210148" y="4672584"/>
-            <a:ext cx="5295748" cy="237744"/>
+            <a:off x="3837851" y="5504688"/>
+            <a:ext cx="2923451" cy="237744"/>
           </a:xfrm>
           <a:prstGeom prst="rect">
             <a:avLst/>
@@ -18627,8 +18591,8 @@
         </p:nvCxnSpPr>
         <p:spPr>
           <a:xfrm>
-            <a:off x="640080" y="4983480"/>
-            <a:ext cx="11002975" cy="0"/>
+            <a:off x="640080" y="5815584"/>
+            <a:ext cx="6258382" cy="0"/>
           </a:xfrm>
           <a:prstGeom prst="line">
             <a:avLst/>
@@ -18650,7 +18614,7 @@
         <p:spPr>
           <a:xfrm flipV="1">
             <a:off x="640080" y="2221992"/>
-            <a:ext cx="0" cy="2761488"/>
+            <a:ext cx="0" cy="3593592"/>
           </a:xfrm>
           <a:prstGeom prst="line">
             <a:avLst/>
@@ -18671,8 +18635,8 @@
         </p:nvSpPr>
         <p:spPr>
           <a:xfrm>
-            <a:off x="640080" y="5038344"/>
-            <a:ext cx="10957255" cy="274320"/>
+            <a:off x="640080" y="5870448"/>
+            <a:ext cx="6212662" cy="274320"/>
           </a:xfrm>
           <a:prstGeom prst="rect">
             <a:avLst/>
@@ -18749,8 +18713,8 @@
         </p:nvSpPr>
         <p:spPr>
           <a:xfrm>
-            <a:off x="6778027" y="3055285"/>
-            <a:ext cx="434523" cy="434523"/>
+            <a:off x="3959594" y="3296595"/>
+            <a:ext cx="567660" cy="567660"/>
           </a:xfrm>
           <a:prstGeom prst="ellipse">
             <a:avLst/>
@@ -18780,7 +18744,7 @@
         </p:nvSpPr>
         <p:spPr>
           <a:xfrm>
-            <a:off x="7249125" y="3162818"/>
+            <a:off x="4563830" y="3470697"/>
             <a:ext cx="814217" cy="219456"/>
           </a:xfrm>
           <a:prstGeom prst="rect">
@@ -18819,8 +18783,8 @@
         </p:nvSpPr>
         <p:spPr>
           <a:xfrm>
-            <a:off x="9857271" y="3854071"/>
-            <a:ext cx="412097" cy="412097"/>
+            <a:off x="5713789" y="4340127"/>
+            <a:ext cx="538362" cy="538362"/>
           </a:xfrm>
           <a:prstGeom prst="ellipse">
             <a:avLst/>
@@ -18850,7 +18814,7 @@
         </p:nvSpPr>
         <p:spPr>
           <a:xfrm>
-            <a:off x="10305944" y="3950391"/>
+            <a:off x="4870001" y="4499580"/>
             <a:ext cx="807212" cy="219456"/>
           </a:xfrm>
           <a:prstGeom prst="rect">
@@ -18889,8 +18853,8 @@
         </p:nvSpPr>
         <p:spPr>
           <a:xfrm>
-            <a:off x="3727050" y="2773605"/>
-            <a:ext cx="400413" cy="400413"/>
+            <a:off x="2242330" y="2928610"/>
+            <a:ext cx="523098" cy="523098"/>
           </a:xfrm>
           <a:prstGeom prst="ellipse">
             <a:avLst/>
@@ -18920,7 +18884,7 @@
         </p:nvSpPr>
         <p:spPr>
           <a:xfrm>
-            <a:off x="4164039" y="2864084"/>
+            <a:off x="2802004" y="3080431"/>
             <a:ext cx="821222" cy="219456"/>
           </a:xfrm>
           <a:prstGeom prst="rect">
@@ -18959,8 +18923,8 @@
         </p:nvSpPr>
         <p:spPr>
           <a:xfrm>
-            <a:off x="4833606" y="3599166"/>
-            <a:ext cx="378753" cy="378753"/>
+            <a:off x="2877744" y="4007120"/>
+            <a:ext cx="494801" cy="494801"/>
           </a:xfrm>
           <a:prstGeom prst="ellipse">
             <a:avLst/>
@@ -18990,7 +18954,7 @@
         </p:nvSpPr>
         <p:spPr>
           <a:xfrm>
-            <a:off x="5248934" y="3678814"/>
+            <a:off x="3409122" y="4144792"/>
             <a:ext cx="433118" cy="219456"/>
           </a:xfrm>
           <a:prstGeom prst="rect">
@@ -19029,8 +18993,8 @@
         </p:nvSpPr>
         <p:spPr>
           <a:xfrm>
-            <a:off x="7746083" y="2630764"/>
-            <a:ext cx="251572" cy="251572"/>
+            <a:off x="4576111" y="2742003"/>
+            <a:ext cx="328653" cy="328653"/>
           </a:xfrm>
           <a:prstGeom prst="ellipse">
             <a:avLst/>
@@ -19060,7 +19024,7 @@
         </p:nvSpPr>
         <p:spPr>
           <a:xfrm>
-            <a:off x="8034230" y="2646822"/>
+            <a:off x="4941339" y="2796601"/>
             <a:ext cx="1181346" cy="219456"/>
           </a:xfrm>
           <a:prstGeom prst="rect">
@@ -19099,8 +19063,8 @@
         </p:nvCxnSpPr>
         <p:spPr>
           <a:xfrm>
-            <a:off x="502920" y="5568696"/>
-            <a:ext cx="11185855" cy="0"/>
+            <a:off x="7145350" y="1481328"/>
+            <a:ext cx="0" cy="4718304"/>
           </a:xfrm>
           <a:prstGeom prst="line">
             <a:avLst/>
@@ -19120,8 +19084,8 @@
         </p:nvSpPr>
         <p:spPr>
           <a:xfrm>
-            <a:off x="502920" y="5705856"/>
-            <a:ext cx="3594506" cy="493776"/>
+            <a:off x="7373950" y="1481328"/>
+            <a:ext cx="4314825" cy="4718304"/>
           </a:xfrm>
           <a:prstGeom prst="rect">
             <a:avLst/>
@@ -19134,10 +19098,19 @@
           </a:bodyPr>
           <a:lstStyle/>
           <a:p>
-            <a:pPr algn="l">
+            <a:pPr algn="l" marL="155448" indent="-155448">
               <a:lnSpc>
-                <a:spcPct val="100000"/>
+                <a:spcPct val="108000"/>
               </a:lnSpc>
+              <a:spcAft>
+                <a:spcPts val="800"/>
+              </a:spcAft>
+              <a:buClr>
+                <a:srgbClr val="1E252D"/>
+              </a:buClr>
+              <a:buSzPct val="100000"/>
+              <a:buFont typeface="Arial"/>
+              <a:buChar char="•"/>
             </a:pPr>
             <a:r>
               <a:rPr sz="1200" b="0">
@@ -19167,34 +19140,20 @@
               <a:t> Competitor A on a comparable basket</a:t>
             </a:r>
           </a:p>
-        </p:txBody>
-      </p:sp>
-      <p:sp>
-        <p:nvSpPr>
-          <p:cNvPr id="31" name="cpe|commentary|text|30"/>
-          <p:cNvSpPr txBox="1"/>
-          <p:nvPr/>
-        </p:nvSpPr>
-        <p:spPr>
-          <a:xfrm>
-            <a:off x="4298594" y="5705856"/>
-            <a:ext cx="3594506" cy="493776"/>
-          </a:xfrm>
-          <a:prstGeom prst="rect">
-            <a:avLst/>
-          </a:prstGeom>
-          <a:noFill/>
-        </p:spPr>
-        <p:txBody>
-          <a:bodyPr wrap="square" lIns="0" rIns="0" tIns="0" bIns="0" anchor="t">
-            <a:noAutofit/>
-          </a:bodyPr>
-          <a:lstStyle/>
-          <a:p>
-            <a:pPr algn="l">
+          <a:p>
+            <a:pPr algn="l" marL="155448" indent="-155448">
               <a:lnSpc>
-                <a:spcPct val="100000"/>
+                <a:spcPct val="108000"/>
               </a:lnSpc>
+              <a:spcAft>
+                <a:spcPts val="800"/>
+              </a:spcAft>
+              <a:buClr>
+                <a:srgbClr val="1E252D"/>
+              </a:buClr>
+              <a:buSzPct val="100000"/>
+              <a:buFont typeface="Arial"/>
+              <a:buChar char="•"/>
             </a:pPr>
             <a:r>
               <a:rPr sz="1200" b="0">
@@ -19206,34 +19165,17 @@
               <a:t>Its experience score trails B and C on freshness and queues</a:t>
             </a:r>
           </a:p>
-        </p:txBody>
-      </p:sp>
-      <p:sp>
-        <p:nvSpPr>
-          <p:cNvPr id="32" name="cpe|commentary|text|31"/>
-          <p:cNvSpPr txBox="1"/>
-          <p:nvPr/>
-        </p:nvSpPr>
-        <p:spPr>
-          <a:xfrm>
-            <a:off x="8094269" y="5705856"/>
-            <a:ext cx="3594506" cy="493776"/>
-          </a:xfrm>
-          <a:prstGeom prst="rect">
-            <a:avLst/>
-          </a:prstGeom>
-          <a:noFill/>
-        </p:spPr>
-        <p:txBody>
-          <a:bodyPr wrap="square" lIns="0" rIns="0" tIns="0" bIns="0" anchor="t">
-            <a:noAutofit/>
-          </a:bodyPr>
-          <a:lstStyle/>
-          <a:p>
-            <a:pPr algn="l">
+          <a:p>
+            <a:pPr algn="l" marL="155448" indent="-155448">
               <a:lnSpc>
-                <a:spcPct val="100000"/>
+                <a:spcPct val="108000"/>
               </a:lnSpc>
+              <a:buClr>
+                <a:srgbClr val="1E252D"/>
+              </a:buClr>
+              <a:buSzPct val="100000"/>
+              <a:buFont typeface="Arial"/>
+              <a:buChar char="•"/>
             </a:pPr>
             <a:r>
               <a:rPr sz="1200" b="0">

--- a/examples/alvora/output/2_final/deck.pptx
+++ b/examples/alvora/output/2_final/deck.pptx
@@ -10396,7 +10396,7 @@
         <p:spPr>
           <a:xfrm>
             <a:off x="502920" y="1517904"/>
-            <a:ext cx="411480" cy="411480"/>
+            <a:ext cx="411480" cy="1003554"/>
           </a:xfrm>
           <a:prstGeom prst="rect">
             <a:avLst/>
@@ -10404,7 +10404,7 @@
           <a:noFill/>
         </p:spPr>
         <p:txBody>
-          <a:bodyPr wrap="square" lIns="0" rIns="0" tIns="0" bIns="0" anchor="t">
+          <a:bodyPr wrap="square" lIns="0" rIns="0" tIns="0" bIns="0" anchor="ctr">
             <a:noAutofit/>
           </a:bodyPr>
           <a:lstStyle/>
@@ -10443,7 +10443,7 @@
           <a:noFill/>
         </p:spPr>
         <p:txBody>
-          <a:bodyPr wrap="square" lIns="0" rIns="0" tIns="0" bIns="0" anchor="t">
+          <a:bodyPr wrap="square" lIns="0" rIns="0" tIns="0" bIns="0" anchor="ctr">
             <a:noAutofit/>
           </a:bodyPr>
           <a:lstStyle/>
@@ -10482,7 +10482,7 @@
           <a:noFill/>
         </p:spPr>
         <p:txBody>
-          <a:bodyPr wrap="square" lIns="0" rIns="0" tIns="0" bIns="0" anchor="t">
+          <a:bodyPr wrap="square" lIns="0" rIns="0" tIns="0" bIns="0" anchor="ctr">
             <a:noAutofit/>
           </a:bodyPr>
           <a:lstStyle/>
@@ -10534,7 +10534,7 @@
         <p:spPr>
           <a:xfrm>
             <a:off x="502920" y="2731770"/>
-            <a:ext cx="411480" cy="411480"/>
+            <a:ext cx="411480" cy="1003554"/>
           </a:xfrm>
           <a:prstGeom prst="rect">
             <a:avLst/>
@@ -10542,7 +10542,7 @@
           <a:noFill/>
         </p:spPr>
         <p:txBody>
-          <a:bodyPr wrap="square" lIns="0" rIns="0" tIns="0" bIns="0" anchor="t">
+          <a:bodyPr wrap="square" lIns="0" rIns="0" tIns="0" bIns="0" anchor="ctr">
             <a:noAutofit/>
           </a:bodyPr>
           <a:lstStyle/>
@@ -10581,7 +10581,7 @@
           <a:noFill/>
         </p:spPr>
         <p:txBody>
-          <a:bodyPr wrap="square" lIns="0" rIns="0" tIns="0" bIns="0" anchor="t">
+          <a:bodyPr wrap="square" lIns="0" rIns="0" tIns="0" bIns="0" anchor="ctr">
             <a:noAutofit/>
           </a:bodyPr>
           <a:lstStyle/>
@@ -10620,7 +10620,7 @@
           <a:noFill/>
         </p:spPr>
         <p:txBody>
-          <a:bodyPr wrap="square" lIns="0" rIns="0" tIns="0" bIns="0" anchor="t">
+          <a:bodyPr wrap="square" lIns="0" rIns="0" tIns="0" bIns="0" anchor="ctr">
             <a:noAutofit/>
           </a:bodyPr>
           <a:lstStyle/>
@@ -10672,7 +10672,7 @@
         <p:spPr>
           <a:xfrm>
             <a:off x="502920" y="3945636"/>
-            <a:ext cx="411480" cy="411480"/>
+            <a:ext cx="411480" cy="1003554"/>
           </a:xfrm>
           <a:prstGeom prst="rect">
             <a:avLst/>
@@ -10680,7 +10680,7 @@
           <a:noFill/>
         </p:spPr>
         <p:txBody>
-          <a:bodyPr wrap="square" lIns="0" rIns="0" tIns="0" bIns="0" anchor="t">
+          <a:bodyPr wrap="square" lIns="0" rIns="0" tIns="0" bIns="0" anchor="ctr">
             <a:noAutofit/>
           </a:bodyPr>
           <a:lstStyle/>
@@ -10719,7 +10719,7 @@
           <a:noFill/>
         </p:spPr>
         <p:txBody>
-          <a:bodyPr wrap="square" lIns="0" rIns="0" tIns="0" bIns="0" anchor="t">
+          <a:bodyPr wrap="square" lIns="0" rIns="0" tIns="0" bIns="0" anchor="ctr">
             <a:noAutofit/>
           </a:bodyPr>
           <a:lstStyle/>
@@ -10758,7 +10758,7 @@
           <a:noFill/>
         </p:spPr>
         <p:txBody>
-          <a:bodyPr wrap="square" lIns="0" rIns="0" tIns="0" bIns="0" anchor="t">
+          <a:bodyPr wrap="square" lIns="0" rIns="0" tIns="0" bIns="0" anchor="ctr">
             <a:noAutofit/>
           </a:bodyPr>
           <a:lstStyle/>
@@ -10810,7 +10810,7 @@
         <p:spPr>
           <a:xfrm>
             <a:off x="502920" y="5159502"/>
-            <a:ext cx="411480" cy="411480"/>
+            <a:ext cx="411480" cy="1003554"/>
           </a:xfrm>
           <a:prstGeom prst="rect">
             <a:avLst/>
@@ -10818,7 +10818,7 @@
           <a:noFill/>
         </p:spPr>
         <p:txBody>
-          <a:bodyPr wrap="square" lIns="0" rIns="0" tIns="0" bIns="0" anchor="t">
+          <a:bodyPr wrap="square" lIns="0" rIns="0" tIns="0" bIns="0" anchor="ctr">
             <a:noAutofit/>
           </a:bodyPr>
           <a:lstStyle/>
@@ -10857,7 +10857,7 @@
           <a:noFill/>
         </p:spPr>
         <p:txBody>
-          <a:bodyPr wrap="square" lIns="0" rIns="0" tIns="0" bIns="0" anchor="t">
+          <a:bodyPr wrap="square" lIns="0" rIns="0" tIns="0" bIns="0" anchor="ctr">
             <a:noAutofit/>
           </a:bodyPr>
           <a:lstStyle/>
@@ -10896,7 +10896,7 @@
           <a:noFill/>
         </p:spPr>
         <p:txBody>
-          <a:bodyPr wrap="square" lIns="0" rIns="0" tIns="0" bIns="0" anchor="t">
+          <a:bodyPr wrap="square" lIns="0" rIns="0" tIns="0" bIns="0" anchor="ctr">
             <a:noAutofit/>
           </a:bodyPr>
           <a:lstStyle/>

--- a/examples/alvora/output/2_final/deck.pptx
+++ b/examples/alvora/output/2_final/deck.pptx
@@ -6240,7 +6240,7 @@
         </p:nvSpPr>
         <p:spPr>
           <a:xfrm>
-            <a:off x="502920" y="2148840"/>
+            <a:off x="502920" y="2384984"/>
             <a:ext cx="822960" cy="64008"/>
           </a:xfrm>
           <a:prstGeom prst="rect">
@@ -6269,8 +6269,8 @@
         </p:nvSpPr>
         <p:spPr>
           <a:xfrm>
-            <a:off x="502920" y="2377440"/>
-            <a:ext cx="9288018" cy="1737360"/>
+            <a:off x="502920" y="2677592"/>
+            <a:ext cx="9288018" cy="626364"/>
           </a:xfrm>
           <a:prstGeom prst="rect">
             <a:avLst/>
@@ -6308,8 +6308,8 @@
         </p:nvSpPr>
         <p:spPr>
           <a:xfrm>
-            <a:off x="502920" y="4160520"/>
-            <a:ext cx="8339099" cy="822960"/>
+            <a:off x="502920" y="3505124"/>
+            <a:ext cx="8339099" cy="329184"/>
           </a:xfrm>
           <a:prstGeom prst="rect">
             <a:avLst/>
@@ -6341,13 +6341,42 @@
       </p:sp>
       <p:sp>
         <p:nvSpPr>
-          <p:cNvPr id="5" name="cpe|text|text|4"/>
+          <p:cNvPr id="5" name="cpe|text|bleed|4"/>
+          <p:cNvSpPr/>
+          <p:nvPr/>
+        </p:nvSpPr>
+        <p:spPr>
+          <a:xfrm>
+            <a:off x="0" y="5486400"/>
+            <a:ext cx="12191695" cy="1371600"/>
+          </a:xfrm>
+          <a:prstGeom prst="rect">
+            <a:avLst/>
+          </a:prstGeom>
+          <a:solidFill>
+            <a:srgbClr val="0B1F3A"/>
+          </a:solidFill>
+          <a:ln>
+            <a:noFill/>
+          </a:ln>
+        </p:spPr>
+        <p:txBody>
+          <a:bodyPr rtlCol="0" anchor="ctr" lIns="0" rIns="0" tIns="0" bIns="0"/>
+          <a:lstStyle/>
+          <a:p>
+            <a:pPr algn="ctr"/>
+          </a:p>
+        </p:txBody>
+      </p:sp>
+      <p:sp>
+        <p:nvSpPr>
+          <p:cNvPr id="6" name="cpe|text|text|5"/>
           <p:cNvSpPr txBox="1"/>
           <p:nvPr/>
         </p:nvSpPr>
         <p:spPr>
           <a:xfrm>
-            <a:off x="502920" y="5989320"/>
+            <a:off x="502920" y="6012180"/>
             <a:ext cx="8339099" cy="320040"/>
           </a:xfrm>
           <a:prstGeom prst="rect">
@@ -6356,7 +6385,7 @@
           <a:noFill/>
         </p:spPr>
         <p:txBody>
-          <a:bodyPr wrap="square" lIns="0" rIns="0" tIns="0" bIns="0" anchor="t">
+          <a:bodyPr wrap="square" lIns="0" rIns="0" tIns="0" bIns="0" anchor="ctr">
             <a:noAutofit/>
           </a:bodyPr>
           <a:lstStyle/>
@@ -6367,9 +6396,9 @@
               </a:lnSpc>
             </a:pPr>
             <a:r>
-              <a:rPr sz="1000" b="0">
-                <a:solidFill>
-                  <a:srgbClr val="5E6A77"/>
+              <a:rPr sz="1100" b="0">
+                <a:solidFill>
+                  <a:srgbClr val="FFFFFF"/>
                 </a:solidFill>
                 <a:latin typeface="Arial"/>
               </a:rPr>

--- a/examples/alvora/output/2_final/deck.pptx
+++ b/examples/alvora/output/2_final/deck.pptx
@@ -7127,7 +7127,7 @@
         <p:spPr>
           <a:xfrm>
             <a:off x="4341457" y="2121408"/>
-            <a:ext cx="0" cy="3401568"/>
+            <a:ext cx="0" cy="3840480"/>
           </a:xfrm>
           <a:prstGeom prst="line">
             <a:avLst/>
@@ -7148,7 +7148,7 @@
         <p:spPr>
           <a:xfrm>
             <a:off x="5391074" y="2121408"/>
-            <a:ext cx="0" cy="3401568"/>
+            <a:ext cx="0" cy="3840480"/>
           </a:xfrm>
           <a:prstGeom prst="line">
             <a:avLst/>
@@ -7169,7 +7169,7 @@
         <p:spPr>
           <a:xfrm>
             <a:off x="6440691" y="2121408"/>
-            <a:ext cx="0" cy="3401568"/>
+            <a:ext cx="0" cy="3840480"/>
           </a:xfrm>
           <a:prstGeom prst="line">
             <a:avLst/>
@@ -7190,7 +7190,7 @@
         <p:spPr>
           <a:xfrm>
             <a:off x="7490308" y="2121408"/>
-            <a:ext cx="0" cy="3401568"/>
+            <a:ext cx="0" cy="3840480"/>
           </a:xfrm>
           <a:prstGeom prst="line">
             <a:avLst/>
@@ -7211,7 +7211,7 @@
         <p:spPr>
           <a:xfrm>
             <a:off x="8539924" y="2121408"/>
-            <a:ext cx="0" cy="3401568"/>
+            <a:ext cx="0" cy="3840480"/>
           </a:xfrm>
           <a:prstGeom prst="line">
             <a:avLst/>
@@ -7232,7 +7232,7 @@
         <p:spPr>
           <a:xfrm>
             <a:off x="9589541" y="2121408"/>
-            <a:ext cx="0" cy="3401568"/>
+            <a:ext cx="0" cy="3840480"/>
           </a:xfrm>
           <a:prstGeom prst="line">
             <a:avLst/>
@@ -7253,7 +7253,7 @@
         <p:spPr>
           <a:xfrm>
             <a:off x="10639158" y="2121408"/>
-            <a:ext cx="0" cy="3401568"/>
+            <a:ext cx="0" cy="3840480"/>
           </a:xfrm>
           <a:prstGeom prst="line">
             <a:avLst/>
@@ -7274,7 +7274,7 @@
         <p:spPr>
           <a:xfrm>
             <a:off x="3816648" y="2075688"/>
-            <a:ext cx="0" cy="3447288"/>
+            <a:ext cx="0" cy="3886200"/>
           </a:xfrm>
           <a:prstGeom prst="line">
             <a:avLst/>
@@ -7295,7 +7295,7 @@
         </p:nvSpPr>
         <p:spPr>
           <a:xfrm>
-            <a:off x="3359448" y="5541264"/>
+            <a:off x="3359448" y="5980176"/>
             <a:ext cx="914400" cy="201168"/>
           </a:xfrm>
           <a:prstGeom prst="rect">
@@ -7335,7 +7335,7 @@
         <p:spPr>
           <a:xfrm>
             <a:off x="502920" y="2121408"/>
-            <a:ext cx="2651760" cy="566928"/>
+            <a:ext cx="2651760" cy="640080"/>
           </a:xfrm>
           <a:prstGeom prst="rect">
             <a:avLst/>
@@ -7373,8 +7373,8 @@
         </p:nvSpPr>
         <p:spPr>
           <a:xfrm>
-            <a:off x="3319272" y="2257471"/>
-            <a:ext cx="3093987" cy="294803"/>
+            <a:off x="3319272" y="2275027"/>
+            <a:ext cx="3093987" cy="332842"/>
           </a:xfrm>
           <a:prstGeom prst="rect">
             <a:avLst/>
@@ -7402,8 +7402,8 @@
         </p:nvSpPr>
         <p:spPr>
           <a:xfrm>
-            <a:off x="3374136" y="2257471"/>
-            <a:ext cx="2984259" cy="294803"/>
+            <a:off x="3374136" y="2275027"/>
+            <a:ext cx="2984259" cy="332842"/>
           </a:xfrm>
           <a:prstGeom prst="rect">
             <a:avLst/>
@@ -7441,7 +7441,7 @@
         </p:nvCxnSpPr>
         <p:spPr>
           <a:xfrm>
-            <a:off x="502920" y="2688336"/>
+            <a:off x="502920" y="2761488"/>
             <a:ext cx="11185855" cy="0"/>
           </a:xfrm>
           <a:prstGeom prst="line">
@@ -7462,8 +7462,8 @@
         </p:nvSpPr>
         <p:spPr>
           <a:xfrm>
-            <a:off x="502920" y="2688336"/>
-            <a:ext cx="2651760" cy="566928"/>
+            <a:off x="502920" y="2761488"/>
+            <a:ext cx="2651760" cy="640080"/>
           </a:xfrm>
           <a:prstGeom prst="rect">
             <a:avLst/>
@@ -7501,8 +7501,8 @@
         </p:nvSpPr>
         <p:spPr>
           <a:xfrm>
-            <a:off x="3319272" y="2824399"/>
-            <a:ext cx="4143604" cy="294803"/>
+            <a:off x="3319272" y="2915107"/>
+            <a:ext cx="4143604" cy="332842"/>
           </a:xfrm>
           <a:prstGeom prst="rect">
             <a:avLst/>
@@ -7530,8 +7530,8 @@
         </p:nvSpPr>
         <p:spPr>
           <a:xfrm>
-            <a:off x="3374136" y="2824399"/>
-            <a:ext cx="4033876" cy="294803"/>
+            <a:off x="3374136" y="2915107"/>
+            <a:ext cx="4033876" cy="332842"/>
           </a:xfrm>
           <a:prstGeom prst="rect">
             <a:avLst/>
@@ -7569,7 +7569,7 @@
         </p:nvCxnSpPr>
         <p:spPr>
           <a:xfrm>
-            <a:off x="502920" y="3255264"/>
+            <a:off x="502920" y="3401568"/>
             <a:ext cx="11185855" cy="0"/>
           </a:xfrm>
           <a:prstGeom prst="line">
@@ -7590,8 +7590,8 @@
         </p:nvSpPr>
         <p:spPr>
           <a:xfrm>
-            <a:off x="502920" y="3255264"/>
-            <a:ext cx="2651760" cy="566928"/>
+            <a:off x="502920" y="3401568"/>
+            <a:ext cx="2651760" cy="640080"/>
           </a:xfrm>
           <a:prstGeom prst="rect">
             <a:avLst/>
@@ -7629,8 +7629,8 @@
         </p:nvSpPr>
         <p:spPr>
           <a:xfrm>
-            <a:off x="4368889" y="3391327"/>
-            <a:ext cx="6242837" cy="294803"/>
+            <a:off x="4368889" y="3555187"/>
+            <a:ext cx="6242837" cy="332842"/>
           </a:xfrm>
           <a:prstGeom prst="rect">
             <a:avLst/>
@@ -7658,8 +7658,8 @@
         </p:nvSpPr>
         <p:spPr>
           <a:xfrm>
-            <a:off x="4423753" y="3391327"/>
-            <a:ext cx="6133109" cy="294803"/>
+            <a:off x="4423753" y="3555187"/>
+            <a:ext cx="6133109" cy="332842"/>
           </a:xfrm>
           <a:prstGeom prst="rect">
             <a:avLst/>
@@ -7697,7 +7697,7 @@
         </p:nvCxnSpPr>
         <p:spPr>
           <a:xfrm>
-            <a:off x="502920" y="3822192"/>
+            <a:off x="502920" y="4041648"/>
             <a:ext cx="11185855" cy="0"/>
           </a:xfrm>
           <a:prstGeom prst="line">
@@ -7718,8 +7718,8 @@
         </p:nvSpPr>
         <p:spPr>
           <a:xfrm>
-            <a:off x="502920" y="3822192"/>
-            <a:ext cx="2651760" cy="566928"/>
+            <a:off x="502920" y="4041648"/>
+            <a:ext cx="2651760" cy="640080"/>
           </a:xfrm>
           <a:prstGeom prst="rect">
             <a:avLst/>
@@ -7757,8 +7757,8 @@
         </p:nvSpPr>
         <p:spPr>
           <a:xfrm>
-            <a:off x="5418506" y="3958255"/>
-            <a:ext cx="6242837" cy="294803"/>
+            <a:off x="5418506" y="4195267"/>
+            <a:ext cx="6242837" cy="332842"/>
           </a:xfrm>
           <a:prstGeom prst="rect">
             <a:avLst/>
@@ -7786,8 +7786,8 @@
         </p:nvSpPr>
         <p:spPr>
           <a:xfrm>
-            <a:off x="5473370" y="3958255"/>
-            <a:ext cx="6133109" cy="294803"/>
+            <a:off x="5473370" y="4195267"/>
+            <a:ext cx="6133109" cy="332842"/>
           </a:xfrm>
           <a:prstGeom prst="rect">
             <a:avLst/>
@@ -7825,7 +7825,7 @@
         </p:nvCxnSpPr>
         <p:spPr>
           <a:xfrm>
-            <a:off x="502920" y="4389120"/>
+            <a:off x="502920" y="4681728"/>
             <a:ext cx="11185855" cy="0"/>
           </a:xfrm>
           <a:prstGeom prst="line">
@@ -7846,8 +7846,8 @@
         </p:nvSpPr>
         <p:spPr>
           <a:xfrm>
-            <a:off x="502920" y="4389120"/>
-            <a:ext cx="2651760" cy="566928"/>
+            <a:off x="502920" y="4681728"/>
+            <a:ext cx="2651760" cy="640080"/>
           </a:xfrm>
           <a:prstGeom prst="rect">
             <a:avLst/>
@@ -7885,8 +7885,8 @@
         </p:nvSpPr>
         <p:spPr>
           <a:xfrm>
-            <a:off x="6468123" y="4604553"/>
-            <a:ext cx="2044370" cy="294803"/>
+            <a:off x="6468123" y="4924958"/>
+            <a:ext cx="2044370" cy="332842"/>
           </a:xfrm>
           <a:prstGeom prst="rect">
             <a:avLst/>
@@ -7914,8 +7914,8 @@
         </p:nvSpPr>
         <p:spPr>
           <a:xfrm>
-            <a:off x="6522987" y="4604553"/>
-            <a:ext cx="1934642" cy="294803"/>
+            <a:off x="6522987" y="4924958"/>
+            <a:ext cx="1934642" cy="332842"/>
           </a:xfrm>
           <a:prstGeom prst="rect">
             <a:avLst/>
@@ -7953,8 +7953,8 @@
         </p:nvSpPr>
         <p:spPr>
           <a:xfrm>
-            <a:off x="8567356" y="4604553"/>
-            <a:ext cx="3093987" cy="294803"/>
+            <a:off x="8567356" y="4924958"/>
+            <a:ext cx="3093987" cy="332842"/>
           </a:xfrm>
           <a:prstGeom prst="rect">
             <a:avLst/>
@@ -7982,8 +7982,8 @@
         </p:nvSpPr>
         <p:spPr>
           <a:xfrm>
-            <a:off x="8750236" y="4604553"/>
-            <a:ext cx="2856243" cy="294803"/>
+            <a:off x="8750236" y="4924958"/>
+            <a:ext cx="2856243" cy="332842"/>
           </a:xfrm>
           <a:prstGeom prst="rect">
             <a:avLst/>
@@ -8021,7 +8021,7 @@
         </p:nvSpPr>
         <p:spPr>
           <a:xfrm>
-            <a:off x="8448484" y="4660514"/>
+            <a:off x="8448484" y="4999939"/>
             <a:ext cx="182880" cy="182880"/>
           </a:xfrm>
           <a:prstGeom prst="diamond">
@@ -8052,7 +8052,7 @@
         </p:nvSpPr>
         <p:spPr>
           <a:xfrm>
-            <a:off x="8224201" y="4403385"/>
+            <a:off x="8224201" y="4723790"/>
             <a:ext cx="631448" cy="182880"/>
           </a:xfrm>
           <a:prstGeom prst="rect">
@@ -8091,7 +8091,7 @@
         </p:nvCxnSpPr>
         <p:spPr>
           <a:xfrm>
-            <a:off x="502920" y="4956048"/>
+            <a:off x="502920" y="5321808"/>
             <a:ext cx="11185855" cy="0"/>
           </a:xfrm>
           <a:prstGeom prst="line">
@@ -8112,8 +8112,8 @@
         </p:nvSpPr>
         <p:spPr>
           <a:xfrm>
-            <a:off x="502920" y="4956048"/>
-            <a:ext cx="2651760" cy="566928"/>
+            <a:off x="502920" y="5321808"/>
+            <a:ext cx="2651760" cy="640080"/>
           </a:xfrm>
           <a:prstGeom prst="rect">
             <a:avLst/>
@@ -8151,8 +8151,8 @@
         </p:nvSpPr>
         <p:spPr>
           <a:xfrm>
-            <a:off x="7517740" y="5092111"/>
-            <a:ext cx="4143604" cy="294803"/>
+            <a:off x="7517740" y="5475427"/>
+            <a:ext cx="4143604" cy="332842"/>
           </a:xfrm>
           <a:prstGeom prst="rect">
             <a:avLst/>
@@ -8180,8 +8180,8 @@
         </p:nvSpPr>
         <p:spPr>
           <a:xfrm>
-            <a:off x="7572604" y="5092111"/>
-            <a:ext cx="4033876" cy="294803"/>
+            <a:off x="7572604" y="5475427"/>
+            <a:ext cx="4033876" cy="332842"/>
           </a:xfrm>
           <a:prstGeom prst="rect">
             <a:avLst/>
@@ -8219,7 +8219,7 @@
         </p:nvCxnSpPr>
         <p:spPr>
           <a:xfrm>
-            <a:off x="502920" y="5522976"/>
+            <a:off x="502920" y="5961888"/>
             <a:ext cx="11185855" cy="0"/>
           </a:xfrm>
           <a:prstGeom prst="line">
@@ -12060,7 +12060,7 @@
         <p:spPr>
           <a:xfrm>
             <a:off x="502920" y="1481328"/>
-            <a:ext cx="2494712" cy="566928"/>
+            <a:ext cx="2494712" cy="514350"/>
           </a:xfrm>
           <a:prstGeom prst="rect">
             <a:avLst/>
@@ -12098,8 +12098,8 @@
         </p:nvSpPr>
         <p:spPr>
           <a:xfrm>
-            <a:off x="502920" y="2048256"/>
-            <a:ext cx="2494712" cy="237744"/>
+            <a:off x="502920" y="1995678"/>
+            <a:ext cx="2494712" cy="209550"/>
           </a:xfrm>
           <a:prstGeom prst="rect">
             <a:avLst/>
@@ -12137,7 +12137,7 @@
         </p:nvSpPr>
         <p:spPr>
           <a:xfrm>
-            <a:off x="502920" y="2304288"/>
+            <a:off x="502920" y="2205228"/>
             <a:ext cx="2494712" cy="209169"/>
           </a:xfrm>
           <a:prstGeom prst="rect">
@@ -12198,7 +12198,7 @@
         <p:spPr>
           <a:xfrm>
             <a:off x="3399968" y="1481328"/>
-            <a:ext cx="2494712" cy="566928"/>
+            <a:ext cx="2494712" cy="514350"/>
           </a:xfrm>
           <a:prstGeom prst="rect">
             <a:avLst/>
@@ -12236,8 +12236,8 @@
         </p:nvSpPr>
         <p:spPr>
           <a:xfrm>
-            <a:off x="3399968" y="2048256"/>
-            <a:ext cx="2494712" cy="237744"/>
+            <a:off x="3399968" y="1995678"/>
+            <a:ext cx="2494712" cy="209550"/>
           </a:xfrm>
           <a:prstGeom prst="rect">
             <a:avLst/>
@@ -12275,7 +12275,7 @@
         </p:nvSpPr>
         <p:spPr>
           <a:xfrm>
-            <a:off x="3399968" y="2304288"/>
+            <a:off x="3399968" y="2205228"/>
             <a:ext cx="2494712" cy="209169"/>
           </a:xfrm>
           <a:prstGeom prst="rect">
@@ -12336,7 +12336,7 @@
         <p:spPr>
           <a:xfrm>
             <a:off x="6297016" y="1481328"/>
-            <a:ext cx="2494712" cy="566928"/>
+            <a:ext cx="2494712" cy="514350"/>
           </a:xfrm>
           <a:prstGeom prst="rect">
             <a:avLst/>
@@ -12374,8 +12374,8 @@
         </p:nvSpPr>
         <p:spPr>
           <a:xfrm>
-            <a:off x="6297016" y="2048256"/>
-            <a:ext cx="2494712" cy="237744"/>
+            <a:off x="6297016" y="1995678"/>
+            <a:ext cx="2494712" cy="209550"/>
           </a:xfrm>
           <a:prstGeom prst="rect">
             <a:avLst/>
@@ -12413,7 +12413,7 @@
         </p:nvSpPr>
         <p:spPr>
           <a:xfrm>
-            <a:off x="6297016" y="2304288"/>
+            <a:off x="6297016" y="2205228"/>
             <a:ext cx="2494712" cy="209169"/>
           </a:xfrm>
           <a:prstGeom prst="rect">
@@ -12474,7 +12474,7 @@
         <p:spPr>
           <a:xfrm>
             <a:off x="9194063" y="1481328"/>
-            <a:ext cx="2494712" cy="566928"/>
+            <a:ext cx="2494712" cy="514350"/>
           </a:xfrm>
           <a:prstGeom prst="rect">
             <a:avLst/>
@@ -12512,8 +12512,8 @@
         </p:nvSpPr>
         <p:spPr>
           <a:xfrm>
-            <a:off x="9194063" y="2048256"/>
-            <a:ext cx="2494712" cy="237744"/>
+            <a:off x="9194063" y="1995678"/>
+            <a:ext cx="2494712" cy="209550"/>
           </a:xfrm>
           <a:prstGeom prst="rect">
             <a:avLst/>
@@ -12551,7 +12551,7 @@
         </p:nvSpPr>
         <p:spPr>
           <a:xfrm>
-            <a:off x="9194063" y="2304288"/>
+            <a:off x="9194063" y="2205228"/>
             <a:ext cx="2494712" cy="209169"/>
           </a:xfrm>
           <a:prstGeom prst="rect">
